--- a/Mapped Curriculum Lessons/Grade 8/Lesson 30 - Changing 2D List Rows/Changing 2D List Rows - Slides.pptx
+++ b/Mapped Curriculum Lessons/Grade 8/Lesson 30 - Changing 2D List Rows/Changing 2D List Rows - Slides.pptx
@@ -2,28 +2,28 @@
 <file path=ppt/presentation.xml><?xml version="1.0" encoding="utf-8"?>
 <p:presentation xmlns:p="http://schemas.openxmlformats.org/presentationml/2006/main" embedTrueTypeFonts="1" saveSubsetFonts="0">
   <p:sldMasterIdLst>
-    <p:sldMasterId xmlns:r="http://schemas.openxmlformats.org/officeDocument/2006/relationships" id="2147483648" r:id="R9130b05e03d84765"/>
+    <p:sldMasterId xmlns:r="http://schemas.openxmlformats.org/officeDocument/2006/relationships" id="2147483648" r:id="R35d16c6771904848"/>
   </p:sldMasterIdLst>
   <p:notesMasterIdLst>
-    <p:notesMasterId xmlns:r="http://schemas.openxmlformats.org/officeDocument/2006/relationships" r:id="R26d18b80446e48c8"/>
+    <p:notesMasterId xmlns:r="http://schemas.openxmlformats.org/officeDocument/2006/relationships" r:id="R755c6676602b41f7"/>
   </p:notesMasterIdLst>
   <p:sldIdLst>
-    <p:sldId xmlns:r="http://schemas.openxmlformats.org/officeDocument/2006/relationships" id="256" r:id="R5eedbc0ad8df4ef2"/>
-    <p:sldId xmlns:r="http://schemas.openxmlformats.org/officeDocument/2006/relationships" id="257" r:id="R75f76ae78df74178"/>
-    <p:sldId xmlns:r="http://schemas.openxmlformats.org/officeDocument/2006/relationships" id="258" r:id="R087f03323e7c4b50"/>
-    <p:sldId xmlns:r="http://schemas.openxmlformats.org/officeDocument/2006/relationships" id="259" r:id="R910ecacb02454986"/>
-    <p:sldId xmlns:r="http://schemas.openxmlformats.org/officeDocument/2006/relationships" id="260" r:id="R912942509b0e4aff"/>
-    <p:sldId xmlns:r="http://schemas.openxmlformats.org/officeDocument/2006/relationships" id="261" r:id="R58de4d06eb104db7"/>
-    <p:sldId xmlns:r="http://schemas.openxmlformats.org/officeDocument/2006/relationships" id="262" r:id="R0bbf732b7fda4d05"/>
-    <p:sldId xmlns:r="http://schemas.openxmlformats.org/officeDocument/2006/relationships" id="263" r:id="Rdfe514508cf143be"/>
-    <p:sldId xmlns:r="http://schemas.openxmlformats.org/officeDocument/2006/relationships" id="264" r:id="Rf5a2999a50414b01"/>
+    <p:sldId xmlns:r="http://schemas.openxmlformats.org/officeDocument/2006/relationships" id="256" r:id="R1fa4e63787f947c1"/>
+    <p:sldId xmlns:r="http://schemas.openxmlformats.org/officeDocument/2006/relationships" id="257" r:id="Ra2fa8082b0a24966"/>
+    <p:sldId xmlns:r="http://schemas.openxmlformats.org/officeDocument/2006/relationships" id="258" r:id="R078dd673d13448a7"/>
+    <p:sldId xmlns:r="http://schemas.openxmlformats.org/officeDocument/2006/relationships" id="259" r:id="R5169097f9cb54cac"/>
+    <p:sldId xmlns:r="http://schemas.openxmlformats.org/officeDocument/2006/relationships" id="260" r:id="Rd83a43660e764308"/>
+    <p:sldId xmlns:r="http://schemas.openxmlformats.org/officeDocument/2006/relationships" id="261" r:id="R21aea94917fb460c"/>
+    <p:sldId xmlns:r="http://schemas.openxmlformats.org/officeDocument/2006/relationships" id="262" r:id="Redba353425104490"/>
+    <p:sldId xmlns:r="http://schemas.openxmlformats.org/officeDocument/2006/relationships" id="263" r:id="Re0ae995e912248cb"/>
+    <p:sldId xmlns:r="http://schemas.openxmlformats.org/officeDocument/2006/relationships" id="264" r:id="Rae44ed3ea95a4958"/>
   </p:sldIdLst>
   <p:sldSz cx="12192000" cy="6858000"/>
   <p:notesSz cx="6858000" cy="9144000"/>
   <p:embeddedFontLst>
     <p:embeddedFont>
       <p:font typeface="JetBrains Mono"/>
-      <p:regular xmlns:r="http://schemas.openxmlformats.org/officeDocument/2006/relationships" r:id="Rc6a82c9f6a4b4f88"/>
+      <p:regular xmlns:r="http://schemas.openxmlformats.org/officeDocument/2006/relationships" r:id="R3b9a94b277fb407f"/>
     </p:embeddedFont>
   </p:embeddedFontLst>
 </p:presentation>
@@ -1071,7 +1071,7 @@
           <p:nvPr/>
         </p:nvPicPr>
         <p:blipFill rotWithShape="1">
-          <a:blip xmlns:r="http://schemas.openxmlformats.org/officeDocument/2006/relationships" xmlns:a="http://schemas.openxmlformats.org/drawingml/2006/main" r:embed="R15e97a0d1f914c8b"/>
+          <a:blip xmlns:r="http://schemas.openxmlformats.org/officeDocument/2006/relationships" xmlns:a="http://schemas.openxmlformats.org/drawingml/2006/main" r:embed="R3765eacbf13a47a4"/>
           <a:stretch xmlns:a="http://schemas.openxmlformats.org/drawingml/2006/main"/>
         </p:blipFill>
         <p:spPr>
@@ -1451,7 +1451,7 @@
           <p:nvPr/>
         </p:nvPicPr>
         <p:blipFill rotWithShape="1">
-          <a:blip xmlns:r="http://schemas.openxmlformats.org/officeDocument/2006/relationships" xmlns:a="http://schemas.openxmlformats.org/drawingml/2006/main" r:embed="Rccd4797c0de54756">
+          <a:blip xmlns:r="http://schemas.openxmlformats.org/officeDocument/2006/relationships" xmlns:a="http://schemas.openxmlformats.org/drawingml/2006/main" r:embed="R74fb22e85f8446ce">
             <a:alphaModFix amt="28000"/>
           </a:blip>
           <a:stretch xmlns:a="http://schemas.openxmlformats.org/drawingml/2006/main"/>
@@ -1664,7 +1664,7 @@
           <p:nvPr/>
         </p:nvPicPr>
         <p:blipFill rotWithShape="1">
-          <a:blip xmlns:r="http://schemas.openxmlformats.org/officeDocument/2006/relationships" xmlns:a="http://schemas.openxmlformats.org/drawingml/2006/main" r:embed="Rd6a3d4bb61d641ce">
+          <a:blip xmlns:r="http://schemas.openxmlformats.org/officeDocument/2006/relationships" xmlns:a="http://schemas.openxmlformats.org/drawingml/2006/main" r:embed="R145de827d5ac46c2">
             <a:alphaModFix amt="28000"/>
           </a:blip>
           <a:stretch xmlns:a="http://schemas.openxmlformats.org/drawingml/2006/main"/>
@@ -1899,7 +1899,7 @@
           <p:nvPr/>
         </p:nvPicPr>
         <p:blipFill rotWithShape="1">
-          <a:blip xmlns:r="http://schemas.openxmlformats.org/officeDocument/2006/relationships" xmlns:a="http://schemas.openxmlformats.org/drawingml/2006/main" r:embed="Rb7952b91506d4146">
+          <a:blip xmlns:r="http://schemas.openxmlformats.org/officeDocument/2006/relationships" xmlns:a="http://schemas.openxmlformats.org/drawingml/2006/main" r:embed="R816ba9ca3a2f42d2">
             <a:alphaModFix amt="28000"/>
           </a:blip>
           <a:stretch xmlns:a="http://schemas.openxmlformats.org/drawingml/2006/main"/>
@@ -2176,7 +2176,7 @@
           <p:nvPr/>
         </p:nvPicPr>
         <p:blipFill rotWithShape="1">
-          <a:blip xmlns:r="http://schemas.openxmlformats.org/officeDocument/2006/relationships" xmlns:a="http://schemas.openxmlformats.org/drawingml/2006/main" r:embed="R4c8c5b5587e54c88">
+          <a:blip xmlns:r="http://schemas.openxmlformats.org/officeDocument/2006/relationships" xmlns:a="http://schemas.openxmlformats.org/drawingml/2006/main" r:embed="R02ae4625e50a4800">
             <a:alphaModFix amt="28000"/>
           </a:blip>
           <a:stretch xmlns:a="http://schemas.openxmlformats.org/drawingml/2006/main"/>
@@ -2451,7 +2451,7 @@
           <p:nvPr/>
         </p:nvPicPr>
         <p:blipFill rotWithShape="1">
-          <a:blip xmlns:r="http://schemas.openxmlformats.org/officeDocument/2006/relationships" xmlns:a="http://schemas.openxmlformats.org/drawingml/2006/main" r:embed="R681883f1e07b4db8">
+          <a:blip xmlns:r="http://schemas.openxmlformats.org/officeDocument/2006/relationships" xmlns:a="http://schemas.openxmlformats.org/drawingml/2006/main" r:embed="R6332a4dab02d4920">
             <a:alphaModFix amt="28000"/>
           </a:blip>
           <a:stretch xmlns:a="http://schemas.openxmlformats.org/drawingml/2006/main"/>
@@ -2875,7 +2875,7 @@
           <p:nvPr/>
         </p:nvPicPr>
         <p:blipFill rotWithShape="1">
-          <a:blip xmlns:r="http://schemas.openxmlformats.org/officeDocument/2006/relationships" xmlns:a="http://schemas.openxmlformats.org/drawingml/2006/main" r:embed="Rd1798b5c762648ae">
+          <a:blip xmlns:r="http://schemas.openxmlformats.org/officeDocument/2006/relationships" xmlns:a="http://schemas.openxmlformats.org/drawingml/2006/main" r:embed="Ra29b9d78c0504c68">
             <a:alphaModFix amt="28000"/>
           </a:blip>
           <a:stretch xmlns:a="http://schemas.openxmlformats.org/drawingml/2006/main"/>
@@ -3016,7 +3016,7 @@
           <p:nvPr/>
         </p:nvPicPr>
         <p:blipFill rotWithShape="1">
-          <a:blip xmlns:r="http://schemas.openxmlformats.org/officeDocument/2006/relationships" xmlns:a="http://schemas.openxmlformats.org/drawingml/2006/main" r:embed="R8c34943526f54fe9">
+          <a:blip xmlns:r="http://schemas.openxmlformats.org/officeDocument/2006/relationships" xmlns:a="http://schemas.openxmlformats.org/drawingml/2006/main" r:embed="Rd92fa1909151487f">
             <a:alphaModFix amt="28000"/>
           </a:blip>
           <a:stretch xmlns:a="http://schemas.openxmlformats.org/drawingml/2006/main"/>
@@ -3130,7 +3130,7 @@
           <p:nvPr/>
         </p:nvPicPr>
         <p:blipFill rotWithShape="1">
-          <a:blip xmlns:r="http://schemas.openxmlformats.org/officeDocument/2006/relationships" xmlns:a="http://schemas.openxmlformats.org/drawingml/2006/main" r:embed="R6a2a16d2e289409f">
+          <a:blip xmlns:r="http://schemas.openxmlformats.org/officeDocument/2006/relationships" xmlns:a="http://schemas.openxmlformats.org/drawingml/2006/main" r:embed="R18c738095de54480">
             <a:alphaModFix amt="28000"/>
           </a:blip>
           <a:stretch xmlns:a="http://schemas.openxmlformats.org/drawingml/2006/main"/>
@@ -3457,7 +3457,7 @@
           <p:nvPr/>
         </p:nvPicPr>
         <p:blipFill rotWithShape="1">
-          <a:blip xmlns:r="http://schemas.openxmlformats.org/officeDocument/2006/relationships" xmlns:a="http://schemas.openxmlformats.org/drawingml/2006/main" r:embed="R6906286fe4ad4d68">
+          <a:blip xmlns:r="http://schemas.openxmlformats.org/officeDocument/2006/relationships" xmlns:a="http://schemas.openxmlformats.org/drawingml/2006/main" r:embed="R6ec259decb9349f2">
             <a:alphaModFix amt="28000"/>
           </a:blip>
           <a:stretch xmlns:a="http://schemas.openxmlformats.org/drawingml/2006/main"/>
@@ -3745,7 +3745,7 @@
           <p:nvPr/>
         </p:nvPicPr>
         <p:blipFill rotWithShape="1">
-          <a:blip xmlns:r="http://schemas.openxmlformats.org/officeDocument/2006/relationships" xmlns:a="http://schemas.openxmlformats.org/drawingml/2006/main" r:embed="R70b0a8c22ed94349">
+          <a:blip xmlns:r="http://schemas.openxmlformats.org/officeDocument/2006/relationships" xmlns:a="http://schemas.openxmlformats.org/drawingml/2006/main" r:embed="R7aaa7bf4fa5a41f7">
             <a:alphaModFix amt="28000"/>
           </a:blip>
           <a:stretch xmlns:a="http://schemas.openxmlformats.org/drawingml/2006/main"/>
@@ -3982,17 +3982,17 @@
   </p:cSld>
   <p:clrMap bg1="lt1" tx1="dk1" bg2="lt2" tx2="dk2" accent1="accent1" accent2="accent2" accent3="accent3" accent4="accent4" accent5="accent5" accent6="accent6" hlink="hlink" folHlink="folHlink"/>
   <p:sldLayoutIdLst>
-    <p:sldLayoutId xmlns:r="http://schemas.openxmlformats.org/officeDocument/2006/relationships" id="2147483649" r:id="R77f8ef4606ca4af3"/>
-    <p:sldLayoutId xmlns:r="http://schemas.openxmlformats.org/officeDocument/2006/relationships" id="2147483650" r:id="R038ce4086cfe4ca3"/>
-    <p:sldLayoutId xmlns:r="http://schemas.openxmlformats.org/officeDocument/2006/relationships" id="2147483651" r:id="R7fddefd65dfe47b0"/>
-    <p:sldLayoutId xmlns:r="http://schemas.openxmlformats.org/officeDocument/2006/relationships" id="2147483652" r:id="R87dd474b679d4a5f"/>
-    <p:sldLayoutId xmlns:r="http://schemas.openxmlformats.org/officeDocument/2006/relationships" id="2147483653" r:id="R2b6cefdfe3b54059"/>
-    <p:sldLayoutId xmlns:r="http://schemas.openxmlformats.org/officeDocument/2006/relationships" id="2147483654" r:id="R0c2f823f833a4786"/>
-    <p:sldLayoutId xmlns:r="http://schemas.openxmlformats.org/officeDocument/2006/relationships" id="2147483655" r:id="R3c086127d9844c8f"/>
-    <p:sldLayoutId xmlns:r="http://schemas.openxmlformats.org/officeDocument/2006/relationships" id="2147483656" r:id="Rb607f9bce7b444a6"/>
-    <p:sldLayoutId xmlns:r="http://schemas.openxmlformats.org/officeDocument/2006/relationships" id="2147483657" r:id="R3ad076602577458e"/>
-    <p:sldLayoutId xmlns:r="http://schemas.openxmlformats.org/officeDocument/2006/relationships" id="2147483658" r:id="Rffa5735c24ad4db4"/>
-    <p:sldLayoutId xmlns:r="http://schemas.openxmlformats.org/officeDocument/2006/relationships" id="2147483659" r:id="R3be3b2b007064332"/>
+    <p:sldLayoutId xmlns:r="http://schemas.openxmlformats.org/officeDocument/2006/relationships" id="2147483649" r:id="R0ac17df308224fdc"/>
+    <p:sldLayoutId xmlns:r="http://schemas.openxmlformats.org/officeDocument/2006/relationships" id="2147483650" r:id="Re00304133253434f"/>
+    <p:sldLayoutId xmlns:r="http://schemas.openxmlformats.org/officeDocument/2006/relationships" id="2147483651" r:id="R8d551b0c46cd4ebb"/>
+    <p:sldLayoutId xmlns:r="http://schemas.openxmlformats.org/officeDocument/2006/relationships" id="2147483652" r:id="R0b97ae934a874416"/>
+    <p:sldLayoutId xmlns:r="http://schemas.openxmlformats.org/officeDocument/2006/relationships" id="2147483653" r:id="Rbc462aeef0f24844"/>
+    <p:sldLayoutId xmlns:r="http://schemas.openxmlformats.org/officeDocument/2006/relationships" id="2147483654" r:id="R3483c65f0dc6464f"/>
+    <p:sldLayoutId xmlns:r="http://schemas.openxmlformats.org/officeDocument/2006/relationships" id="2147483655" r:id="R22d072a9f0fa466c"/>
+    <p:sldLayoutId xmlns:r="http://schemas.openxmlformats.org/officeDocument/2006/relationships" id="2147483656" r:id="R8e7c5adf014247f7"/>
+    <p:sldLayoutId xmlns:r="http://schemas.openxmlformats.org/officeDocument/2006/relationships" id="2147483657" r:id="Rcbed097ca35f46e8"/>
+    <p:sldLayoutId xmlns:r="http://schemas.openxmlformats.org/officeDocument/2006/relationships" id="2147483658" r:id="Re2d8c2bec9bf49fc"/>
+    <p:sldLayoutId xmlns:r="http://schemas.openxmlformats.org/officeDocument/2006/relationships" id="2147483659" r:id="Rc6ea4ff343fa492b"/>
   </p:sldLayoutIdLst>
   <p:hf hdr="0" ftr="0" dt="0"/>
   <p:txStyles>
@@ -7297,29 +7297,7 @@
                 <a:ea typeface="Calibri"/>
                 <a:cs typeface="Calibri"/>
               </a:rPr>
-              <a:t>, 11] at row position 0 and remove the deletion line. The final output must begin </a:t>
-            </a:r>
-            <a:r>
-              <a:rPr sz="2400" b="0">
-                <a:solidFill>
-                  <a:srgbClr val="067D17"/>
-                </a:solidFill>
-                <a:latin typeface="JetBrains Mono"/>
-                <a:ea typeface="JetBrains Mono"/>
-                <a:cs typeface="JetBrains Mono"/>
-              </a:rPr>
-              <a:t>"Drama"</a:t>
-            </a:r>
-            <a:r>
-              <a:rPr sz="2400" b="0">
-                <a:solidFill>
-                  <a:srgbClr val="080808"/>
-                </a:solidFill>
-                <a:latin typeface="Calibri"/>
-                <a:ea typeface="Calibri"/>
-                <a:cs typeface="Calibri"/>
-              </a:rPr>
-              <a:t> 11.</a:t>
+              <a:t>, 11] at row position 0 and remove the deletion line. The final output must begin Drama 11.</a:t>
             </a:r>
           </a:p>
         </p:txBody>

--- a/Mapped Curriculum Lessons/Grade 8/Lesson 30 - Changing 2D List Rows/Changing 2D List Rows - Slides.pptx
+++ b/Mapped Curriculum Lessons/Grade 8/Lesson 30 - Changing 2D List Rows/Changing 2D List Rows - Slides.pptx
@@ -2,28 +2,28 @@
 <file path=ppt/presentation.xml><?xml version="1.0" encoding="utf-8"?>
 <p:presentation xmlns:p="http://schemas.openxmlformats.org/presentationml/2006/main" embedTrueTypeFonts="1" saveSubsetFonts="0">
   <p:sldMasterIdLst>
-    <p:sldMasterId xmlns:r="http://schemas.openxmlformats.org/officeDocument/2006/relationships" id="2147483648" r:id="R35d16c6771904848"/>
+    <p:sldMasterId xmlns:r="http://schemas.openxmlformats.org/officeDocument/2006/relationships" id="2147483648" r:id="R82cf70c515f04b29"/>
   </p:sldMasterIdLst>
   <p:notesMasterIdLst>
-    <p:notesMasterId xmlns:r="http://schemas.openxmlformats.org/officeDocument/2006/relationships" r:id="R755c6676602b41f7"/>
+    <p:notesMasterId xmlns:r="http://schemas.openxmlformats.org/officeDocument/2006/relationships" r:id="Rc13ac12946b9430a"/>
   </p:notesMasterIdLst>
   <p:sldIdLst>
-    <p:sldId xmlns:r="http://schemas.openxmlformats.org/officeDocument/2006/relationships" id="256" r:id="R1fa4e63787f947c1"/>
-    <p:sldId xmlns:r="http://schemas.openxmlformats.org/officeDocument/2006/relationships" id="257" r:id="Ra2fa8082b0a24966"/>
-    <p:sldId xmlns:r="http://schemas.openxmlformats.org/officeDocument/2006/relationships" id="258" r:id="R078dd673d13448a7"/>
-    <p:sldId xmlns:r="http://schemas.openxmlformats.org/officeDocument/2006/relationships" id="259" r:id="R5169097f9cb54cac"/>
-    <p:sldId xmlns:r="http://schemas.openxmlformats.org/officeDocument/2006/relationships" id="260" r:id="Rd83a43660e764308"/>
-    <p:sldId xmlns:r="http://schemas.openxmlformats.org/officeDocument/2006/relationships" id="261" r:id="R21aea94917fb460c"/>
-    <p:sldId xmlns:r="http://schemas.openxmlformats.org/officeDocument/2006/relationships" id="262" r:id="Redba353425104490"/>
-    <p:sldId xmlns:r="http://schemas.openxmlformats.org/officeDocument/2006/relationships" id="263" r:id="Re0ae995e912248cb"/>
-    <p:sldId xmlns:r="http://schemas.openxmlformats.org/officeDocument/2006/relationships" id="264" r:id="Rae44ed3ea95a4958"/>
+    <p:sldId xmlns:r="http://schemas.openxmlformats.org/officeDocument/2006/relationships" id="256" r:id="R566892d5fb0343aa"/>
+    <p:sldId xmlns:r="http://schemas.openxmlformats.org/officeDocument/2006/relationships" id="257" r:id="R8c7d38846c4240c6"/>
+    <p:sldId xmlns:r="http://schemas.openxmlformats.org/officeDocument/2006/relationships" id="258" r:id="R6158e1ee8db040dd"/>
+    <p:sldId xmlns:r="http://schemas.openxmlformats.org/officeDocument/2006/relationships" id="259" r:id="Rb492ffefc86e4cfb"/>
+    <p:sldId xmlns:r="http://schemas.openxmlformats.org/officeDocument/2006/relationships" id="260" r:id="Ra770e40eda4d42e3"/>
+    <p:sldId xmlns:r="http://schemas.openxmlformats.org/officeDocument/2006/relationships" id="261" r:id="R252fef8bcaf5425a"/>
+    <p:sldId xmlns:r="http://schemas.openxmlformats.org/officeDocument/2006/relationships" id="262" r:id="R1ead9bf332344b53"/>
+    <p:sldId xmlns:r="http://schemas.openxmlformats.org/officeDocument/2006/relationships" id="263" r:id="R0f336a2ae2a24946"/>
+    <p:sldId xmlns:r="http://schemas.openxmlformats.org/officeDocument/2006/relationships" id="264" r:id="Rf8854f954e2948bc"/>
   </p:sldIdLst>
   <p:sldSz cx="12192000" cy="6858000"/>
   <p:notesSz cx="6858000" cy="9144000"/>
   <p:embeddedFontLst>
     <p:embeddedFont>
       <p:font typeface="JetBrains Mono"/>
-      <p:regular xmlns:r="http://schemas.openxmlformats.org/officeDocument/2006/relationships" r:id="R3b9a94b277fb407f"/>
+      <p:regular xmlns:r="http://schemas.openxmlformats.org/officeDocument/2006/relationships" r:id="Ra6bdfbb99a91405f"/>
     </p:embeddedFont>
   </p:embeddedFontLst>
 </p:presentation>
@@ -1071,7 +1071,7 @@
           <p:nvPr/>
         </p:nvPicPr>
         <p:blipFill rotWithShape="1">
-          <a:blip xmlns:r="http://schemas.openxmlformats.org/officeDocument/2006/relationships" xmlns:a="http://schemas.openxmlformats.org/drawingml/2006/main" r:embed="R3765eacbf13a47a4"/>
+          <a:blip xmlns:r="http://schemas.openxmlformats.org/officeDocument/2006/relationships" xmlns:a="http://schemas.openxmlformats.org/drawingml/2006/main" r:embed="R0b29937aac15408e"/>
           <a:stretch xmlns:a="http://schemas.openxmlformats.org/drawingml/2006/main"/>
         </p:blipFill>
         <p:spPr>
@@ -1451,7 +1451,7 @@
           <p:nvPr/>
         </p:nvPicPr>
         <p:blipFill rotWithShape="1">
-          <a:blip xmlns:r="http://schemas.openxmlformats.org/officeDocument/2006/relationships" xmlns:a="http://schemas.openxmlformats.org/drawingml/2006/main" r:embed="R74fb22e85f8446ce">
+          <a:blip xmlns:r="http://schemas.openxmlformats.org/officeDocument/2006/relationships" xmlns:a="http://schemas.openxmlformats.org/drawingml/2006/main" r:embed="R6340905cbe8b4cec">
             <a:alphaModFix amt="28000"/>
           </a:blip>
           <a:stretch xmlns:a="http://schemas.openxmlformats.org/drawingml/2006/main"/>
@@ -1664,7 +1664,7 @@
           <p:nvPr/>
         </p:nvPicPr>
         <p:blipFill rotWithShape="1">
-          <a:blip xmlns:r="http://schemas.openxmlformats.org/officeDocument/2006/relationships" xmlns:a="http://schemas.openxmlformats.org/drawingml/2006/main" r:embed="R145de827d5ac46c2">
+          <a:blip xmlns:r="http://schemas.openxmlformats.org/officeDocument/2006/relationships" xmlns:a="http://schemas.openxmlformats.org/drawingml/2006/main" r:embed="R1810b55f69a34383">
             <a:alphaModFix amt="28000"/>
           </a:blip>
           <a:stretch xmlns:a="http://schemas.openxmlformats.org/drawingml/2006/main"/>
@@ -1899,7 +1899,7 @@
           <p:nvPr/>
         </p:nvPicPr>
         <p:blipFill rotWithShape="1">
-          <a:blip xmlns:r="http://schemas.openxmlformats.org/officeDocument/2006/relationships" xmlns:a="http://schemas.openxmlformats.org/drawingml/2006/main" r:embed="R816ba9ca3a2f42d2">
+          <a:blip xmlns:r="http://schemas.openxmlformats.org/officeDocument/2006/relationships" xmlns:a="http://schemas.openxmlformats.org/drawingml/2006/main" r:embed="Re25a8e9ba2894a23">
             <a:alphaModFix amt="28000"/>
           </a:blip>
           <a:stretch xmlns:a="http://schemas.openxmlformats.org/drawingml/2006/main"/>
@@ -2176,7 +2176,7 @@
           <p:nvPr/>
         </p:nvPicPr>
         <p:blipFill rotWithShape="1">
-          <a:blip xmlns:r="http://schemas.openxmlformats.org/officeDocument/2006/relationships" xmlns:a="http://schemas.openxmlformats.org/drawingml/2006/main" r:embed="R02ae4625e50a4800">
+          <a:blip xmlns:r="http://schemas.openxmlformats.org/officeDocument/2006/relationships" xmlns:a="http://schemas.openxmlformats.org/drawingml/2006/main" r:embed="Rcefd2264c7fc4f43">
             <a:alphaModFix amt="28000"/>
           </a:blip>
           <a:stretch xmlns:a="http://schemas.openxmlformats.org/drawingml/2006/main"/>
@@ -2451,7 +2451,7 @@
           <p:nvPr/>
         </p:nvPicPr>
         <p:blipFill rotWithShape="1">
-          <a:blip xmlns:r="http://schemas.openxmlformats.org/officeDocument/2006/relationships" xmlns:a="http://schemas.openxmlformats.org/drawingml/2006/main" r:embed="R6332a4dab02d4920">
+          <a:blip xmlns:r="http://schemas.openxmlformats.org/officeDocument/2006/relationships" xmlns:a="http://schemas.openxmlformats.org/drawingml/2006/main" r:embed="R75c62e9e38d84d90">
             <a:alphaModFix amt="28000"/>
           </a:blip>
           <a:stretch xmlns:a="http://schemas.openxmlformats.org/drawingml/2006/main"/>
@@ -2875,7 +2875,7 @@
           <p:nvPr/>
         </p:nvPicPr>
         <p:blipFill rotWithShape="1">
-          <a:blip xmlns:r="http://schemas.openxmlformats.org/officeDocument/2006/relationships" xmlns:a="http://schemas.openxmlformats.org/drawingml/2006/main" r:embed="Ra29b9d78c0504c68">
+          <a:blip xmlns:r="http://schemas.openxmlformats.org/officeDocument/2006/relationships" xmlns:a="http://schemas.openxmlformats.org/drawingml/2006/main" r:embed="Rd98c410fca4c4360">
             <a:alphaModFix amt="28000"/>
           </a:blip>
           <a:stretch xmlns:a="http://schemas.openxmlformats.org/drawingml/2006/main"/>
@@ -3016,7 +3016,7 @@
           <p:nvPr/>
         </p:nvPicPr>
         <p:blipFill rotWithShape="1">
-          <a:blip xmlns:r="http://schemas.openxmlformats.org/officeDocument/2006/relationships" xmlns:a="http://schemas.openxmlformats.org/drawingml/2006/main" r:embed="Rd92fa1909151487f">
+          <a:blip xmlns:r="http://schemas.openxmlformats.org/officeDocument/2006/relationships" xmlns:a="http://schemas.openxmlformats.org/drawingml/2006/main" r:embed="R336ffe7448e0431d">
             <a:alphaModFix amt="28000"/>
           </a:blip>
           <a:stretch xmlns:a="http://schemas.openxmlformats.org/drawingml/2006/main"/>
@@ -3130,7 +3130,7 @@
           <p:nvPr/>
         </p:nvPicPr>
         <p:blipFill rotWithShape="1">
-          <a:blip xmlns:r="http://schemas.openxmlformats.org/officeDocument/2006/relationships" xmlns:a="http://schemas.openxmlformats.org/drawingml/2006/main" r:embed="R18c738095de54480">
+          <a:blip xmlns:r="http://schemas.openxmlformats.org/officeDocument/2006/relationships" xmlns:a="http://schemas.openxmlformats.org/drawingml/2006/main" r:embed="R6bbed140d7714279">
             <a:alphaModFix amt="28000"/>
           </a:blip>
           <a:stretch xmlns:a="http://schemas.openxmlformats.org/drawingml/2006/main"/>
@@ -3457,7 +3457,7 @@
           <p:nvPr/>
         </p:nvPicPr>
         <p:blipFill rotWithShape="1">
-          <a:blip xmlns:r="http://schemas.openxmlformats.org/officeDocument/2006/relationships" xmlns:a="http://schemas.openxmlformats.org/drawingml/2006/main" r:embed="R6ec259decb9349f2">
+          <a:blip xmlns:r="http://schemas.openxmlformats.org/officeDocument/2006/relationships" xmlns:a="http://schemas.openxmlformats.org/drawingml/2006/main" r:embed="R25e76a860b604536">
             <a:alphaModFix amt="28000"/>
           </a:blip>
           <a:stretch xmlns:a="http://schemas.openxmlformats.org/drawingml/2006/main"/>
@@ -3745,7 +3745,7 @@
           <p:nvPr/>
         </p:nvPicPr>
         <p:blipFill rotWithShape="1">
-          <a:blip xmlns:r="http://schemas.openxmlformats.org/officeDocument/2006/relationships" xmlns:a="http://schemas.openxmlformats.org/drawingml/2006/main" r:embed="R7aaa7bf4fa5a41f7">
+          <a:blip xmlns:r="http://schemas.openxmlformats.org/officeDocument/2006/relationships" xmlns:a="http://schemas.openxmlformats.org/drawingml/2006/main" r:embed="R5009b203be5a4419">
             <a:alphaModFix amt="28000"/>
           </a:blip>
           <a:stretch xmlns:a="http://schemas.openxmlformats.org/drawingml/2006/main"/>
@@ -3982,17 +3982,17 @@
   </p:cSld>
   <p:clrMap bg1="lt1" tx1="dk1" bg2="lt2" tx2="dk2" accent1="accent1" accent2="accent2" accent3="accent3" accent4="accent4" accent5="accent5" accent6="accent6" hlink="hlink" folHlink="folHlink"/>
   <p:sldLayoutIdLst>
-    <p:sldLayoutId xmlns:r="http://schemas.openxmlformats.org/officeDocument/2006/relationships" id="2147483649" r:id="R0ac17df308224fdc"/>
-    <p:sldLayoutId xmlns:r="http://schemas.openxmlformats.org/officeDocument/2006/relationships" id="2147483650" r:id="Re00304133253434f"/>
-    <p:sldLayoutId xmlns:r="http://schemas.openxmlformats.org/officeDocument/2006/relationships" id="2147483651" r:id="R8d551b0c46cd4ebb"/>
-    <p:sldLayoutId xmlns:r="http://schemas.openxmlformats.org/officeDocument/2006/relationships" id="2147483652" r:id="R0b97ae934a874416"/>
-    <p:sldLayoutId xmlns:r="http://schemas.openxmlformats.org/officeDocument/2006/relationships" id="2147483653" r:id="Rbc462aeef0f24844"/>
-    <p:sldLayoutId xmlns:r="http://schemas.openxmlformats.org/officeDocument/2006/relationships" id="2147483654" r:id="R3483c65f0dc6464f"/>
-    <p:sldLayoutId xmlns:r="http://schemas.openxmlformats.org/officeDocument/2006/relationships" id="2147483655" r:id="R22d072a9f0fa466c"/>
-    <p:sldLayoutId xmlns:r="http://schemas.openxmlformats.org/officeDocument/2006/relationships" id="2147483656" r:id="R8e7c5adf014247f7"/>
-    <p:sldLayoutId xmlns:r="http://schemas.openxmlformats.org/officeDocument/2006/relationships" id="2147483657" r:id="Rcbed097ca35f46e8"/>
-    <p:sldLayoutId xmlns:r="http://schemas.openxmlformats.org/officeDocument/2006/relationships" id="2147483658" r:id="Re2d8c2bec9bf49fc"/>
-    <p:sldLayoutId xmlns:r="http://schemas.openxmlformats.org/officeDocument/2006/relationships" id="2147483659" r:id="Rc6ea4ff343fa492b"/>
+    <p:sldLayoutId xmlns:r="http://schemas.openxmlformats.org/officeDocument/2006/relationships" id="2147483649" r:id="R3822d91a35a648dc"/>
+    <p:sldLayoutId xmlns:r="http://schemas.openxmlformats.org/officeDocument/2006/relationships" id="2147483650" r:id="R59b4f624c7f14241"/>
+    <p:sldLayoutId xmlns:r="http://schemas.openxmlformats.org/officeDocument/2006/relationships" id="2147483651" r:id="R77b785a79a9d4291"/>
+    <p:sldLayoutId xmlns:r="http://schemas.openxmlformats.org/officeDocument/2006/relationships" id="2147483652" r:id="Rc0d46e1d42004408"/>
+    <p:sldLayoutId xmlns:r="http://schemas.openxmlformats.org/officeDocument/2006/relationships" id="2147483653" r:id="R262958ae8f364189"/>
+    <p:sldLayoutId xmlns:r="http://schemas.openxmlformats.org/officeDocument/2006/relationships" id="2147483654" r:id="R02a8a9c83adf43f4"/>
+    <p:sldLayoutId xmlns:r="http://schemas.openxmlformats.org/officeDocument/2006/relationships" id="2147483655" r:id="Rd28be6bd215244ed"/>
+    <p:sldLayoutId xmlns:r="http://schemas.openxmlformats.org/officeDocument/2006/relationships" id="2147483656" r:id="R9a9fac53059d445a"/>
+    <p:sldLayoutId xmlns:r="http://schemas.openxmlformats.org/officeDocument/2006/relationships" id="2147483657" r:id="Rb97f06b90ba041db"/>
+    <p:sldLayoutId xmlns:r="http://schemas.openxmlformats.org/officeDocument/2006/relationships" id="2147483658" r:id="Rd6d363c933184b75"/>
+    <p:sldLayoutId xmlns:r="http://schemas.openxmlformats.org/officeDocument/2006/relationships" id="2147483659" r:id="R20ddce08b4134fcf"/>
   </p:sldLayoutIdLst>
   <p:hf hdr="0" ftr="0" dt="0"/>
   <p:txStyles>
@@ -7955,7 +7955,7 @@
         </p:spPr>
         <p:txBody>
           <a:bodyPr xmlns:a="http://schemas.openxmlformats.org/drawingml/2006/main">
-            <a:normAutofit fontScale="100000"/>
+            <a:normAutofit fontScale="87835"/>
           </a:bodyPr>
           <a:lstStyle xmlns:a="http://schemas.openxmlformats.org/drawingml/2006/main"/>
           <a:p xmlns:a="http://schemas.openxmlformats.org/drawingml/2006/main">
@@ -7974,7 +7974,95 @@
                 <a:ea typeface="Calibri"/>
                 <a:cs typeface="Calibri"/>
               </a:rPr>
-              <a:t>Ask for a new club name and member count, build a two-field row, append it, then ask for one valid row position to delete. Display the remaining rows.</a:t>
+              <a:t>Ask for a new club name and member count and store them in [name] and [members]. Store both values in [new_club], then append [new_club] to [clubs]. Ask for a deletion position from 0 to 2 and store it in [position], then delete that row. Use a </a:t>
+            </a:r>
+            <a:r>
+              <a:rPr sz="2400" b="0">
+                <a:solidFill>
+                  <a:srgbClr val="1750EB"/>
+                </a:solidFill>
+                <a:latin typeface="JetBrains Mono"/>
+                <a:ea typeface="JetBrains Mono"/>
+                <a:cs typeface="JetBrains Mono"/>
+              </a:rPr>
+              <a:t>for</a:t>
+            </a:r>
+            <a:r>
+              <a:rPr sz="2400" b="0">
+                <a:solidFill>
+                  <a:srgbClr val="080808"/>
+                </a:solidFill>
+                <a:latin typeface="Calibri"/>
+                <a:ea typeface="Calibri"/>
+                <a:cs typeface="Calibri"/>
+              </a:rPr>
+              <a:t> loop to display each remaining club name and member count. Test </a:t>
+            </a:r>
+            <a:r>
+              <a:rPr sz="2400" b="0">
+                <a:solidFill>
+                  <a:srgbClr val="067D17"/>
+                </a:solidFill>
+                <a:latin typeface="JetBrains Mono"/>
+                <a:ea typeface="JetBrains Mono"/>
+                <a:cs typeface="JetBrains Mono"/>
+              </a:rPr>
+              <a:t>"Code"</a:t>
+            </a:r>
+            <a:r>
+              <a:rPr sz="2400" b="0">
+                <a:solidFill>
+                  <a:srgbClr val="080808"/>
+                </a:solidFill>
+                <a:latin typeface="Calibri"/>
+                <a:ea typeface="Calibri"/>
+                <a:cs typeface="Calibri"/>
+              </a:rPr>
+              <a:t>, 15 and position 0; display </a:t>
+            </a:r>
+            <a:r>
+              <a:rPr sz="2400" b="0">
+                <a:solidFill>
+                  <a:srgbClr val="067D17"/>
+                </a:solidFill>
+                <a:latin typeface="JetBrains Mono"/>
+                <a:ea typeface="JetBrains Mono"/>
+                <a:cs typeface="JetBrains Mono"/>
+              </a:rPr>
+              <a:t>"Chess 18"</a:t>
+            </a:r>
+            <a:r>
+              <a:rPr sz="2400" b="0">
+                <a:solidFill>
+                  <a:srgbClr val="080808"/>
+                </a:solidFill>
+                <a:latin typeface="Calibri"/>
+                <a:ea typeface="Calibri"/>
+                <a:cs typeface="Calibri"/>
+              </a:rPr>
+              <a:t> followed by </a:t>
+            </a:r>
+            <a:r>
+              <a:rPr sz="2400" b="0">
+                <a:solidFill>
+                  <a:srgbClr val="067D17"/>
+                </a:solidFill>
+                <a:latin typeface="JetBrains Mono"/>
+                <a:ea typeface="JetBrains Mono"/>
+                <a:cs typeface="JetBrains Mono"/>
+              </a:rPr>
+              <a:t>"Code 15"</a:t>
+            </a:r>
+            <a:r>
+              <a:rPr sz="2400" b="0">
+                <a:solidFill>
+                  <a:srgbClr val="080808"/>
+                </a:solidFill>
+                <a:latin typeface="Calibri"/>
+                <a:ea typeface="Calibri"/>
+                <a:cs typeface="Calibri"/>
+              </a:rPr>
+              <a:t>.</a:t>
             </a:r>
           </a:p>
         </p:txBody>
@@ -8632,7 +8720,7 @@
         </p:spPr>
         <p:txBody>
           <a:bodyPr xmlns:a="http://schemas.openxmlformats.org/drawingml/2006/main">
-            <a:normAutofit fontScale="100000"/>
+            <a:normAutofit fontScale="81195"/>
           </a:bodyPr>
           <a:lstStyle xmlns:a="http://schemas.openxmlformats.org/drawingml/2006/main"/>
           <a:p xmlns:a="http://schemas.openxmlformats.org/drawingml/2006/main">
@@ -8651,7 +8739,161 @@
                 <a:ea typeface="Calibri"/>
                 <a:cs typeface="Calibri"/>
               </a:rPr>
-              <a:t>Build an event schedule editor with three [event, room] rows. Insert one user-created row at a valid position, delete a different valid row from the enlarged schedule, and display numbered remaining rows using a counter.</a:t>
+              <a:t>Store [</a:t>
+            </a:r>
+            <a:r>
+              <a:rPr sz="2400" b="0">
+                <a:solidFill>
+                  <a:srgbClr val="067D17"/>
+                </a:solidFill>
+                <a:latin typeface="JetBrains Mono"/>
+                <a:ea typeface="JetBrains Mono"/>
+                <a:cs typeface="JetBrains Mono"/>
+              </a:rPr>
+              <a:t>'Talk'</a:t>
+            </a:r>
+            <a:r>
+              <a:rPr sz="2400" b="0">
+                <a:solidFill>
+                  <a:srgbClr val="080808"/>
+                </a:solidFill>
+                <a:latin typeface="Calibri"/>
+                <a:ea typeface="Calibri"/>
+                <a:cs typeface="Calibri"/>
+              </a:rPr>
+              <a:t>, 1], [</a:t>
+            </a:r>
+            <a:r>
+              <a:rPr sz="2400" b="0">
+                <a:solidFill>
+                  <a:srgbClr val="067D17"/>
+                </a:solidFill>
+                <a:latin typeface="JetBrains Mono"/>
+                <a:ea typeface="JetBrains Mono"/>
+                <a:cs typeface="JetBrains Mono"/>
+              </a:rPr>
+              <a:t>'Quiz'</a:t>
+            </a:r>
+            <a:r>
+              <a:rPr sz="2400" b="0">
+                <a:solidFill>
+                  <a:srgbClr val="080808"/>
+                </a:solidFill>
+                <a:latin typeface="Calibri"/>
+                <a:ea typeface="Calibri"/>
+                <a:cs typeface="Calibri"/>
+              </a:rPr>
+              <a:t>, 2] and [</a:t>
+            </a:r>
+            <a:r>
+              <a:rPr sz="2400" b="0">
+                <a:solidFill>
+                  <a:srgbClr val="067D17"/>
+                </a:solidFill>
+                <a:latin typeface="JetBrains Mono"/>
+                <a:ea typeface="JetBrains Mono"/>
+                <a:cs typeface="JetBrains Mono"/>
+              </a:rPr>
+              <a:t>'Demo'</a:t>
+            </a:r>
+            <a:r>
+              <a:rPr sz="2400" b="0">
+                <a:solidFill>
+                  <a:srgbClr val="080808"/>
+                </a:solidFill>
+                <a:latin typeface="Calibri"/>
+                <a:ea typeface="Calibri"/>
+                <a:cs typeface="Calibri"/>
+              </a:rPr>
+              <a:t>, 3] in [schedule]. Ask for an insertion position, event and room, then insert the new [event, room] row at that position. Ask for a different position and delete that row from the enlarged schedule. Use a counter called [number] to display each remaining position, event and room. Test inserting [</a:t>
+            </a:r>
+            <a:r>
+              <a:rPr sz="2400" b="0">
+                <a:solidFill>
+                  <a:srgbClr val="067D17"/>
+                </a:solidFill>
+                <a:latin typeface="JetBrains Mono"/>
+                <a:ea typeface="JetBrains Mono"/>
+                <a:cs typeface="JetBrains Mono"/>
+              </a:rPr>
+              <a:t>'Workshop'</a:t>
+            </a:r>
+            <a:r>
+              <a:rPr sz="2400" b="0">
+                <a:solidFill>
+                  <a:srgbClr val="080808"/>
+                </a:solidFill>
+                <a:latin typeface="Calibri"/>
+                <a:ea typeface="Calibri"/>
+                <a:cs typeface="Calibri"/>
+              </a:rPr>
+              <a:t>, 4] at position 1 and deleting position 3; display </a:t>
+            </a:r>
+            <a:r>
+              <a:rPr sz="2400" b="0">
+                <a:solidFill>
+                  <a:srgbClr val="067D17"/>
+                </a:solidFill>
+                <a:latin typeface="JetBrains Mono"/>
+                <a:ea typeface="JetBrains Mono"/>
+                <a:cs typeface="JetBrains Mono"/>
+              </a:rPr>
+              <a:t>"0 Talk 1"</a:t>
+            </a:r>
+            <a:r>
+              <a:rPr sz="2400" b="0">
+                <a:solidFill>
+                  <a:srgbClr val="080808"/>
+                </a:solidFill>
+                <a:latin typeface="Calibri"/>
+                <a:ea typeface="Calibri"/>
+                <a:cs typeface="Calibri"/>
+              </a:rPr>
+              <a:t>, </a:t>
+            </a:r>
+            <a:r>
+              <a:rPr sz="2400" b="0">
+                <a:solidFill>
+                  <a:srgbClr val="067D17"/>
+                </a:solidFill>
+                <a:latin typeface="JetBrains Mono"/>
+                <a:ea typeface="JetBrains Mono"/>
+                <a:cs typeface="JetBrains Mono"/>
+              </a:rPr>
+              <a:t>"1 Workshop 4"</a:t>
+            </a:r>
+            <a:r>
+              <a:rPr sz="2400" b="0">
+                <a:solidFill>
+                  <a:srgbClr val="080808"/>
+                </a:solidFill>
+                <a:latin typeface="Calibri"/>
+                <a:ea typeface="Calibri"/>
+                <a:cs typeface="Calibri"/>
+              </a:rPr>
+              <a:t> and </a:t>
+            </a:r>
+            <a:r>
+              <a:rPr sz="2400" b="0">
+                <a:solidFill>
+                  <a:srgbClr val="067D17"/>
+                </a:solidFill>
+                <a:latin typeface="JetBrains Mono"/>
+                <a:ea typeface="JetBrains Mono"/>
+                <a:cs typeface="JetBrains Mono"/>
+              </a:rPr>
+              <a:t>"2 Quiz 2"</a:t>
+            </a:r>
+            <a:r>
+              <a:rPr sz="2400" b="0">
+                <a:solidFill>
+                  <a:srgbClr val="080808"/>
+                </a:solidFill>
+                <a:latin typeface="Calibri"/>
+                <a:ea typeface="Calibri"/>
+                <a:cs typeface="Calibri"/>
+              </a:rPr>
+              <a:t>.</a:t>
             </a:r>
           </a:p>
         </p:txBody>

--- a/Mapped Curriculum Lessons/Grade 8/Lesson 30 - Changing 2D List Rows/Changing 2D List Rows - Slides.pptx
+++ b/Mapped Curriculum Lessons/Grade 8/Lesson 30 - Changing 2D List Rows/Changing 2D List Rows - Slides.pptx
@@ -2,28 +2,28 @@
 <file path=ppt/presentation.xml><?xml version="1.0" encoding="utf-8"?>
 <p:presentation xmlns:p="http://schemas.openxmlformats.org/presentationml/2006/main" embedTrueTypeFonts="1" saveSubsetFonts="0">
   <p:sldMasterIdLst>
-    <p:sldMasterId xmlns:r="http://schemas.openxmlformats.org/officeDocument/2006/relationships" id="2147483648" r:id="R82cf70c515f04b29"/>
+    <p:sldMasterId xmlns:r="http://schemas.openxmlformats.org/officeDocument/2006/relationships" id="2147483648" r:id="Rbeda22e534df4eaa"/>
   </p:sldMasterIdLst>
   <p:notesMasterIdLst>
-    <p:notesMasterId xmlns:r="http://schemas.openxmlformats.org/officeDocument/2006/relationships" r:id="Rc13ac12946b9430a"/>
+    <p:notesMasterId xmlns:r="http://schemas.openxmlformats.org/officeDocument/2006/relationships" r:id="Reb72087f228a424c"/>
   </p:notesMasterIdLst>
   <p:sldIdLst>
-    <p:sldId xmlns:r="http://schemas.openxmlformats.org/officeDocument/2006/relationships" id="256" r:id="R566892d5fb0343aa"/>
-    <p:sldId xmlns:r="http://schemas.openxmlformats.org/officeDocument/2006/relationships" id="257" r:id="R8c7d38846c4240c6"/>
-    <p:sldId xmlns:r="http://schemas.openxmlformats.org/officeDocument/2006/relationships" id="258" r:id="R6158e1ee8db040dd"/>
-    <p:sldId xmlns:r="http://schemas.openxmlformats.org/officeDocument/2006/relationships" id="259" r:id="Rb492ffefc86e4cfb"/>
-    <p:sldId xmlns:r="http://schemas.openxmlformats.org/officeDocument/2006/relationships" id="260" r:id="Ra770e40eda4d42e3"/>
-    <p:sldId xmlns:r="http://schemas.openxmlformats.org/officeDocument/2006/relationships" id="261" r:id="R252fef8bcaf5425a"/>
-    <p:sldId xmlns:r="http://schemas.openxmlformats.org/officeDocument/2006/relationships" id="262" r:id="R1ead9bf332344b53"/>
-    <p:sldId xmlns:r="http://schemas.openxmlformats.org/officeDocument/2006/relationships" id="263" r:id="R0f336a2ae2a24946"/>
-    <p:sldId xmlns:r="http://schemas.openxmlformats.org/officeDocument/2006/relationships" id="264" r:id="Rf8854f954e2948bc"/>
+    <p:sldId xmlns:r="http://schemas.openxmlformats.org/officeDocument/2006/relationships" id="256" r:id="Rd8f75a7fb9204c65"/>
+    <p:sldId xmlns:r="http://schemas.openxmlformats.org/officeDocument/2006/relationships" id="257" r:id="Recacfcfecb2e4bc6"/>
+    <p:sldId xmlns:r="http://schemas.openxmlformats.org/officeDocument/2006/relationships" id="258" r:id="R7900b9bc0b54410a"/>
+    <p:sldId xmlns:r="http://schemas.openxmlformats.org/officeDocument/2006/relationships" id="259" r:id="R3f6ad1acf9da4a9a"/>
+    <p:sldId xmlns:r="http://schemas.openxmlformats.org/officeDocument/2006/relationships" id="260" r:id="R50e519b331ac49ee"/>
+    <p:sldId xmlns:r="http://schemas.openxmlformats.org/officeDocument/2006/relationships" id="261" r:id="R1a37ca32074b42ba"/>
+    <p:sldId xmlns:r="http://schemas.openxmlformats.org/officeDocument/2006/relationships" id="262" r:id="Rcb908bbec33c47c4"/>
+    <p:sldId xmlns:r="http://schemas.openxmlformats.org/officeDocument/2006/relationships" id="263" r:id="R82e1c551e46a4673"/>
+    <p:sldId xmlns:r="http://schemas.openxmlformats.org/officeDocument/2006/relationships" id="264" r:id="R54ac6cbe68d54f08"/>
   </p:sldIdLst>
   <p:sldSz cx="12192000" cy="6858000"/>
   <p:notesSz cx="6858000" cy="9144000"/>
   <p:embeddedFontLst>
     <p:embeddedFont>
       <p:font typeface="JetBrains Mono"/>
-      <p:regular xmlns:r="http://schemas.openxmlformats.org/officeDocument/2006/relationships" r:id="Ra6bdfbb99a91405f"/>
+      <p:regular xmlns:r="http://schemas.openxmlformats.org/officeDocument/2006/relationships" r:id="R6a9dd421594a4159"/>
     </p:embeddedFont>
   </p:embeddedFontLst>
 </p:presentation>
@@ -1071,7 +1071,7 @@
           <p:nvPr/>
         </p:nvPicPr>
         <p:blipFill rotWithShape="1">
-          <a:blip xmlns:r="http://schemas.openxmlformats.org/officeDocument/2006/relationships" xmlns:a="http://schemas.openxmlformats.org/drawingml/2006/main" r:embed="R0b29937aac15408e"/>
+          <a:blip xmlns:r="http://schemas.openxmlformats.org/officeDocument/2006/relationships" xmlns:a="http://schemas.openxmlformats.org/drawingml/2006/main" r:embed="R96d4fa1dcfed4ece"/>
           <a:stretch xmlns:a="http://schemas.openxmlformats.org/drawingml/2006/main"/>
         </p:blipFill>
         <p:spPr>
@@ -1451,7 +1451,7 @@
           <p:nvPr/>
         </p:nvPicPr>
         <p:blipFill rotWithShape="1">
-          <a:blip xmlns:r="http://schemas.openxmlformats.org/officeDocument/2006/relationships" xmlns:a="http://schemas.openxmlformats.org/drawingml/2006/main" r:embed="R6340905cbe8b4cec">
+          <a:blip xmlns:r="http://schemas.openxmlformats.org/officeDocument/2006/relationships" xmlns:a="http://schemas.openxmlformats.org/drawingml/2006/main" r:embed="R93d675c441d44de8">
             <a:alphaModFix amt="28000"/>
           </a:blip>
           <a:stretch xmlns:a="http://schemas.openxmlformats.org/drawingml/2006/main"/>
@@ -1664,7 +1664,7 @@
           <p:nvPr/>
         </p:nvPicPr>
         <p:blipFill rotWithShape="1">
-          <a:blip xmlns:r="http://schemas.openxmlformats.org/officeDocument/2006/relationships" xmlns:a="http://schemas.openxmlformats.org/drawingml/2006/main" r:embed="R1810b55f69a34383">
+          <a:blip xmlns:r="http://schemas.openxmlformats.org/officeDocument/2006/relationships" xmlns:a="http://schemas.openxmlformats.org/drawingml/2006/main" r:embed="R8a421a1bd9b94991">
             <a:alphaModFix amt="28000"/>
           </a:blip>
           <a:stretch xmlns:a="http://schemas.openxmlformats.org/drawingml/2006/main"/>
@@ -1899,7 +1899,7 @@
           <p:nvPr/>
         </p:nvPicPr>
         <p:blipFill rotWithShape="1">
-          <a:blip xmlns:r="http://schemas.openxmlformats.org/officeDocument/2006/relationships" xmlns:a="http://schemas.openxmlformats.org/drawingml/2006/main" r:embed="Re25a8e9ba2894a23">
+          <a:blip xmlns:r="http://schemas.openxmlformats.org/officeDocument/2006/relationships" xmlns:a="http://schemas.openxmlformats.org/drawingml/2006/main" r:embed="Rb43a246f0d484099">
             <a:alphaModFix amt="28000"/>
           </a:blip>
           <a:stretch xmlns:a="http://schemas.openxmlformats.org/drawingml/2006/main"/>
@@ -2176,7 +2176,7 @@
           <p:nvPr/>
         </p:nvPicPr>
         <p:blipFill rotWithShape="1">
-          <a:blip xmlns:r="http://schemas.openxmlformats.org/officeDocument/2006/relationships" xmlns:a="http://schemas.openxmlformats.org/drawingml/2006/main" r:embed="Rcefd2264c7fc4f43">
+          <a:blip xmlns:r="http://schemas.openxmlformats.org/officeDocument/2006/relationships" xmlns:a="http://schemas.openxmlformats.org/drawingml/2006/main" r:embed="R4116e4c40704485b">
             <a:alphaModFix amt="28000"/>
           </a:blip>
           <a:stretch xmlns:a="http://schemas.openxmlformats.org/drawingml/2006/main"/>
@@ -2451,7 +2451,7 @@
           <p:nvPr/>
         </p:nvPicPr>
         <p:blipFill rotWithShape="1">
-          <a:blip xmlns:r="http://schemas.openxmlformats.org/officeDocument/2006/relationships" xmlns:a="http://schemas.openxmlformats.org/drawingml/2006/main" r:embed="R75c62e9e38d84d90">
+          <a:blip xmlns:r="http://schemas.openxmlformats.org/officeDocument/2006/relationships" xmlns:a="http://schemas.openxmlformats.org/drawingml/2006/main" r:embed="R9f96dd29aff64046">
             <a:alphaModFix amt="28000"/>
           </a:blip>
           <a:stretch xmlns:a="http://schemas.openxmlformats.org/drawingml/2006/main"/>
@@ -2875,7 +2875,7 @@
           <p:nvPr/>
         </p:nvPicPr>
         <p:blipFill rotWithShape="1">
-          <a:blip xmlns:r="http://schemas.openxmlformats.org/officeDocument/2006/relationships" xmlns:a="http://schemas.openxmlformats.org/drawingml/2006/main" r:embed="Rd98c410fca4c4360">
+          <a:blip xmlns:r="http://schemas.openxmlformats.org/officeDocument/2006/relationships" xmlns:a="http://schemas.openxmlformats.org/drawingml/2006/main" r:embed="R055b47b1207e4fd7">
             <a:alphaModFix amt="28000"/>
           </a:blip>
           <a:stretch xmlns:a="http://schemas.openxmlformats.org/drawingml/2006/main"/>
@@ -3016,7 +3016,7 @@
           <p:nvPr/>
         </p:nvPicPr>
         <p:blipFill rotWithShape="1">
-          <a:blip xmlns:r="http://schemas.openxmlformats.org/officeDocument/2006/relationships" xmlns:a="http://schemas.openxmlformats.org/drawingml/2006/main" r:embed="R336ffe7448e0431d">
+          <a:blip xmlns:r="http://schemas.openxmlformats.org/officeDocument/2006/relationships" xmlns:a="http://schemas.openxmlformats.org/drawingml/2006/main" r:embed="Rf7e37151e86f4f2f">
             <a:alphaModFix amt="28000"/>
           </a:blip>
           <a:stretch xmlns:a="http://schemas.openxmlformats.org/drawingml/2006/main"/>
@@ -3130,7 +3130,7 @@
           <p:nvPr/>
         </p:nvPicPr>
         <p:blipFill rotWithShape="1">
-          <a:blip xmlns:r="http://schemas.openxmlformats.org/officeDocument/2006/relationships" xmlns:a="http://schemas.openxmlformats.org/drawingml/2006/main" r:embed="R6bbed140d7714279">
+          <a:blip xmlns:r="http://schemas.openxmlformats.org/officeDocument/2006/relationships" xmlns:a="http://schemas.openxmlformats.org/drawingml/2006/main" r:embed="R7ac49de4f2a2447a">
             <a:alphaModFix amt="28000"/>
           </a:blip>
           <a:stretch xmlns:a="http://schemas.openxmlformats.org/drawingml/2006/main"/>
@@ -3457,7 +3457,7 @@
           <p:nvPr/>
         </p:nvPicPr>
         <p:blipFill rotWithShape="1">
-          <a:blip xmlns:r="http://schemas.openxmlformats.org/officeDocument/2006/relationships" xmlns:a="http://schemas.openxmlformats.org/drawingml/2006/main" r:embed="R25e76a860b604536">
+          <a:blip xmlns:r="http://schemas.openxmlformats.org/officeDocument/2006/relationships" xmlns:a="http://schemas.openxmlformats.org/drawingml/2006/main" r:embed="R3aabeb21e60549d6">
             <a:alphaModFix amt="28000"/>
           </a:blip>
           <a:stretch xmlns:a="http://schemas.openxmlformats.org/drawingml/2006/main"/>
@@ -3745,7 +3745,7 @@
           <p:nvPr/>
         </p:nvPicPr>
         <p:blipFill rotWithShape="1">
-          <a:blip xmlns:r="http://schemas.openxmlformats.org/officeDocument/2006/relationships" xmlns:a="http://schemas.openxmlformats.org/drawingml/2006/main" r:embed="R5009b203be5a4419">
+          <a:blip xmlns:r="http://schemas.openxmlformats.org/officeDocument/2006/relationships" xmlns:a="http://schemas.openxmlformats.org/drawingml/2006/main" r:embed="Rdf1810310cea459b">
             <a:alphaModFix amt="28000"/>
           </a:blip>
           <a:stretch xmlns:a="http://schemas.openxmlformats.org/drawingml/2006/main"/>
@@ -3982,17 +3982,17 @@
   </p:cSld>
   <p:clrMap bg1="lt1" tx1="dk1" bg2="lt2" tx2="dk2" accent1="accent1" accent2="accent2" accent3="accent3" accent4="accent4" accent5="accent5" accent6="accent6" hlink="hlink" folHlink="folHlink"/>
   <p:sldLayoutIdLst>
-    <p:sldLayoutId xmlns:r="http://schemas.openxmlformats.org/officeDocument/2006/relationships" id="2147483649" r:id="R3822d91a35a648dc"/>
-    <p:sldLayoutId xmlns:r="http://schemas.openxmlformats.org/officeDocument/2006/relationships" id="2147483650" r:id="R59b4f624c7f14241"/>
-    <p:sldLayoutId xmlns:r="http://schemas.openxmlformats.org/officeDocument/2006/relationships" id="2147483651" r:id="R77b785a79a9d4291"/>
-    <p:sldLayoutId xmlns:r="http://schemas.openxmlformats.org/officeDocument/2006/relationships" id="2147483652" r:id="Rc0d46e1d42004408"/>
-    <p:sldLayoutId xmlns:r="http://schemas.openxmlformats.org/officeDocument/2006/relationships" id="2147483653" r:id="R262958ae8f364189"/>
-    <p:sldLayoutId xmlns:r="http://schemas.openxmlformats.org/officeDocument/2006/relationships" id="2147483654" r:id="R02a8a9c83adf43f4"/>
-    <p:sldLayoutId xmlns:r="http://schemas.openxmlformats.org/officeDocument/2006/relationships" id="2147483655" r:id="Rd28be6bd215244ed"/>
-    <p:sldLayoutId xmlns:r="http://schemas.openxmlformats.org/officeDocument/2006/relationships" id="2147483656" r:id="R9a9fac53059d445a"/>
-    <p:sldLayoutId xmlns:r="http://schemas.openxmlformats.org/officeDocument/2006/relationships" id="2147483657" r:id="Rb97f06b90ba041db"/>
-    <p:sldLayoutId xmlns:r="http://schemas.openxmlformats.org/officeDocument/2006/relationships" id="2147483658" r:id="Rd6d363c933184b75"/>
-    <p:sldLayoutId xmlns:r="http://schemas.openxmlformats.org/officeDocument/2006/relationships" id="2147483659" r:id="R20ddce08b4134fcf"/>
+    <p:sldLayoutId xmlns:r="http://schemas.openxmlformats.org/officeDocument/2006/relationships" id="2147483649" r:id="Rceecf09c438f4e90"/>
+    <p:sldLayoutId xmlns:r="http://schemas.openxmlformats.org/officeDocument/2006/relationships" id="2147483650" r:id="Rcae9d04c0c4440be"/>
+    <p:sldLayoutId xmlns:r="http://schemas.openxmlformats.org/officeDocument/2006/relationships" id="2147483651" r:id="Rcea51b50be794869"/>
+    <p:sldLayoutId xmlns:r="http://schemas.openxmlformats.org/officeDocument/2006/relationships" id="2147483652" r:id="Rc63113262672420b"/>
+    <p:sldLayoutId xmlns:r="http://schemas.openxmlformats.org/officeDocument/2006/relationships" id="2147483653" r:id="R30a8a99b462f4421"/>
+    <p:sldLayoutId xmlns:r="http://schemas.openxmlformats.org/officeDocument/2006/relationships" id="2147483654" r:id="R52a84259181848af"/>
+    <p:sldLayoutId xmlns:r="http://schemas.openxmlformats.org/officeDocument/2006/relationships" id="2147483655" r:id="R56249d390e114068"/>
+    <p:sldLayoutId xmlns:r="http://schemas.openxmlformats.org/officeDocument/2006/relationships" id="2147483656" r:id="Rb6ef7f99300b459c"/>
+    <p:sldLayoutId xmlns:r="http://schemas.openxmlformats.org/officeDocument/2006/relationships" id="2147483657" r:id="R5b8f9ffdaa274eb0"/>
+    <p:sldLayoutId xmlns:r="http://schemas.openxmlformats.org/officeDocument/2006/relationships" id="2147483658" r:id="R9c94f16fb8174c3b"/>
+    <p:sldLayoutId xmlns:r="http://schemas.openxmlformats.org/officeDocument/2006/relationships" id="2147483659" r:id="Rd8eac2aacb5f4c94"/>
   </p:sldLayoutIdLst>
   <p:hf hdr="0" ftr="0" dt="0"/>
   <p:txStyles>
@@ -7275,18 +7275,21 @@
                 <a:ea typeface="Calibri"/>
                 <a:cs typeface="Calibri"/>
               </a:rPr>
-              <a:t>Insert [</a:t>
-            </a:r>
-            <a:r>
-              <a:rPr sz="2400" b="0">
-                <a:solidFill>
-                  <a:srgbClr val="067D17"/>
-                </a:solidFill>
-                <a:latin typeface="JetBrains Mono"/>
-                <a:ea typeface="JetBrains Mono"/>
-                <a:cs typeface="JetBrains Mono"/>
-              </a:rPr>
-              <a:t>"Drama"</a:t>
+              <a:t>Change the example so the deleted club is not lost. Before the del line, store clubs[0] in </a:t>
+            </a:r>
+            <a:r>
+              <a:rPr sz="2050" b="0">
+                <a:solidFill>
+                  <a:srgbClr val="6A1B9A"/>
+                </a:solidFill>
+                <a:highlight>
+                  <a:srgbClr val="ECEAF4"/>
+                </a:highlight>
+                <a:latin typeface="JetBrains Mono"/>
+                <a:ea typeface="JetBrains Mono"/>
+                <a:cs typeface="JetBrains Mono"/>
+              </a:rPr>
+              <a:t> removed </a:t>
             </a:r>
             <a:r>
               <a:rPr sz="2400" b="0">
@@ -7297,7 +7300,98 @@
                 <a:ea typeface="Calibri"/>
                 <a:cs typeface="Calibri"/>
               </a:rPr>
-              <a:t>, 11] at row position 0 and remove the deletion line. The final output must begin Drama 11.</a:t>
+              <a:t>. After the deletion, use </a:t>
+            </a:r>
+            <a:r>
+              <a:rPr sz="2050" b="0">
+                <a:solidFill>
+                  <a:srgbClr val="1750EB"/>
+                </a:solidFill>
+                <a:latin typeface="JetBrains Mono"/>
+                <a:ea typeface="JetBrains Mono"/>
+                <a:cs typeface="JetBrains Mono"/>
+              </a:rPr>
+              <a:t>append()</a:t>
+            </a:r>
+            <a:r>
+              <a:rPr sz="2400" b="0">
+                <a:solidFill>
+                  <a:srgbClr val="080808"/>
+                </a:solidFill>
+                <a:latin typeface="Calibri"/>
+                <a:ea typeface="Calibri"/>
+                <a:cs typeface="Calibri"/>
+              </a:rPr>
+              <a:t> to add </a:t>
+            </a:r>
+            <a:r>
+              <a:rPr sz="2050" b="0">
+                <a:solidFill>
+                  <a:srgbClr val="6A1B9A"/>
+                </a:solidFill>
+                <a:highlight>
+                  <a:srgbClr val="ECEAF4"/>
+                </a:highlight>
+                <a:latin typeface="JetBrains Mono"/>
+                <a:ea typeface="JetBrains Mono"/>
+                <a:cs typeface="JetBrains Mono"/>
+              </a:rPr>
+              <a:t> removed </a:t>
+            </a:r>
+            <a:r>
+              <a:rPr sz="2400" b="0">
+                <a:solidFill>
+                  <a:srgbClr val="080808"/>
+                </a:solidFill>
+                <a:latin typeface="Calibri"/>
+                <a:ea typeface="Calibri"/>
+                <a:cs typeface="Calibri"/>
+              </a:rPr>
+              <a:t> to the end and display </a:t>
+            </a:r>
+            <a:r>
+              <a:rPr sz="2050" b="0">
+                <a:solidFill>
+                  <a:srgbClr val="067D17"/>
+                </a:solidFill>
+                <a:latin typeface="JetBrains Mono"/>
+                <a:ea typeface="JetBrains Mono"/>
+                <a:cs typeface="JetBrains Mono"/>
+              </a:rPr>
+              <a:t>"Moved to end:"</a:t>
+            </a:r>
+            <a:r>
+              <a:rPr sz="2400" b="0">
+                <a:solidFill>
+                  <a:srgbClr val="080808"/>
+                </a:solidFill>
+                <a:latin typeface="Calibri"/>
+                <a:ea typeface="Calibri"/>
+                <a:cs typeface="Calibri"/>
+              </a:rPr>
+              <a:t> with its name before the loop. The loop should now end with </a:t>
+            </a:r>
+            <a:r>
+              <a:rPr sz="2050" b="0">
+                <a:solidFill>
+                  <a:srgbClr val="067D17"/>
+                </a:solidFill>
+                <a:latin typeface="JetBrains Mono"/>
+                <a:ea typeface="JetBrains Mono"/>
+                <a:cs typeface="JetBrains Mono"/>
+              </a:rPr>
+              <a:t>"Art 12"</a:t>
+            </a:r>
+            <a:r>
+              <a:rPr sz="2400" b="0">
+                <a:solidFill>
+                  <a:srgbClr val="080808"/>
+                </a:solidFill>
+                <a:latin typeface="Calibri"/>
+                <a:ea typeface="Calibri"/>
+                <a:cs typeface="Calibri"/>
+              </a:rPr>
+              <a:t>.</a:t>
             </a:r>
           </a:p>
         </p:txBody>
@@ -7955,7 +8049,7 @@
         </p:spPr>
         <p:txBody>
           <a:bodyPr xmlns:a="http://schemas.openxmlformats.org/drawingml/2006/main">
-            <a:normAutofit fontScale="87835"/>
+            <a:normAutofit fontScale="92683"/>
           </a:bodyPr>
           <a:lstStyle xmlns:a="http://schemas.openxmlformats.org/drawingml/2006/main"/>
           <a:p xmlns:a="http://schemas.openxmlformats.org/drawingml/2006/main">
@@ -7974,18 +8068,21 @@
                 <a:ea typeface="Calibri"/>
                 <a:cs typeface="Calibri"/>
               </a:rPr>
-              <a:t>Ask for a new club name and member count and store them in [name] and [members]. Store both values in [new_club], then append [new_club] to [clubs]. Ask for a deletion position from 0 to 2 and store it in [position], then delete that row. Use a </a:t>
-            </a:r>
-            <a:r>
-              <a:rPr sz="2400" b="0">
-                <a:solidFill>
-                  <a:srgbClr val="1750EB"/>
-                </a:solidFill>
-                <a:latin typeface="JetBrains Mono"/>
-                <a:ea typeface="JetBrains Mono"/>
-                <a:cs typeface="JetBrains Mono"/>
-              </a:rPr>
-              <a:t>for</a:t>
+              <a:t>Change the example so the user supplies the new club. Ask for </a:t>
+            </a:r>
+            <a:r>
+              <a:rPr sz="2050" b="0">
+                <a:solidFill>
+                  <a:srgbClr val="6A1B9A"/>
+                </a:solidFill>
+                <a:highlight>
+                  <a:srgbClr val="ECEAF4"/>
+                </a:highlight>
+                <a:latin typeface="JetBrains Mono"/>
+                <a:ea typeface="JetBrains Mono"/>
+                <a:cs typeface="JetBrains Mono"/>
+              </a:rPr>
+              <a:t> name </a:t>
             </a:r>
             <a:r>
               <a:rPr sz="2400" b="0">
@@ -7996,18 +8093,21 @@
                 <a:ea typeface="Calibri"/>
                 <a:cs typeface="Calibri"/>
               </a:rPr>
-              <a:t> loop to display each remaining club name and member count. Test </a:t>
-            </a:r>
-            <a:r>
-              <a:rPr sz="2400" b="0">
-                <a:solidFill>
-                  <a:srgbClr val="067D17"/>
-                </a:solidFill>
-                <a:latin typeface="JetBrains Mono"/>
-                <a:ea typeface="JetBrains Mono"/>
-                <a:cs typeface="JetBrains Mono"/>
-              </a:rPr>
-              <a:t>"Code"</a:t>
+              <a:t> and a whole-number </a:t>
+            </a:r>
+            <a:r>
+              <a:rPr sz="2050" b="0">
+                <a:solidFill>
+                  <a:srgbClr val="6A1B9A"/>
+                </a:solidFill>
+                <a:highlight>
+                  <a:srgbClr val="ECEAF4"/>
+                </a:highlight>
+                <a:latin typeface="JetBrains Mono"/>
+                <a:ea typeface="JetBrains Mono"/>
+                <a:cs typeface="JetBrains Mono"/>
+              </a:rPr>
+              <a:t> members </a:t>
             </a:r>
             <a:r>
               <a:rPr sz="2400" b="0">
@@ -8018,18 +8118,21 @@
                 <a:ea typeface="Calibri"/>
                 <a:cs typeface="Calibri"/>
               </a:rPr>
-              <a:t>, 15 and position 0; display </a:t>
-            </a:r>
-            <a:r>
-              <a:rPr sz="2400" b="0">
-                <a:solidFill>
-                  <a:srgbClr val="067D17"/>
-                </a:solidFill>
-                <a:latin typeface="JetBrains Mono"/>
-                <a:ea typeface="JetBrains Mono"/>
-                <a:cs typeface="JetBrains Mono"/>
-              </a:rPr>
-              <a:t>"Chess 18"</a:t>
+              <a:t>, store them as a row in </a:t>
+            </a:r>
+            <a:r>
+              <a:rPr sz="2050" b="0">
+                <a:solidFill>
+                  <a:srgbClr val="6A1B9A"/>
+                </a:solidFill>
+                <a:highlight>
+                  <a:srgbClr val="ECEAF4"/>
+                </a:highlight>
+                <a:latin typeface="JetBrains Mono"/>
+                <a:ea typeface="JetBrains Mono"/>
+                <a:cs typeface="JetBrains Mono"/>
+              </a:rPr>
+              <a:t> new_club </a:t>
             </a:r>
             <a:r>
               <a:rPr sz="2400" b="0">
@@ -8040,10 +8143,76 @@
                 <a:ea typeface="Calibri"/>
                 <a:cs typeface="Calibri"/>
               </a:rPr>
-              <a:t> followed by </a:t>
+              <a:t> and append it. Remove the fixed Music insert. Ask for a row to delete from 0 to 2, then use a </a:t>
+            </a:r>
+            <a:r>
+              <a:rPr sz="2050" b="0">
+                <a:solidFill>
+                  <a:srgbClr val="1750EB"/>
+                </a:solidFill>
+                <a:latin typeface="JetBrains Mono"/>
+                <a:ea typeface="JetBrains Mono"/>
+                <a:cs typeface="JetBrains Mono"/>
+              </a:rPr>
+              <a:t>for</a:t>
             </a:r>
             <a:r>
               <a:rPr sz="2400" b="0">
+                <a:solidFill>
+                  <a:srgbClr val="080808"/>
+                </a:solidFill>
+                <a:latin typeface="Calibri"/>
+                <a:ea typeface="Calibri"/>
+                <a:cs typeface="Calibri"/>
+              </a:rPr>
+              <a:t> loop to display the remaining clubs. For example, </a:t>
+            </a:r>
+            <a:r>
+              <a:rPr sz="2050" b="0">
+                <a:solidFill>
+                  <a:srgbClr val="067D17"/>
+                </a:solidFill>
+                <a:latin typeface="JetBrains Mono"/>
+                <a:ea typeface="JetBrains Mono"/>
+                <a:cs typeface="JetBrains Mono"/>
+              </a:rPr>
+              <a:t>"Code"</a:t>
+            </a:r>
+            <a:r>
+              <a:rPr sz="2400" b="0">
+                <a:solidFill>
+                  <a:srgbClr val="080808"/>
+                </a:solidFill>
+                <a:latin typeface="Calibri"/>
+                <a:ea typeface="Calibri"/>
+                <a:cs typeface="Calibri"/>
+              </a:rPr>
+              <a:t>, 15 and 0 display </a:t>
+            </a:r>
+            <a:r>
+              <a:rPr sz="2050" b="0">
+                <a:solidFill>
+                  <a:srgbClr val="067D17"/>
+                </a:solidFill>
+                <a:latin typeface="JetBrains Mono"/>
+                <a:ea typeface="JetBrains Mono"/>
+                <a:cs typeface="JetBrains Mono"/>
+              </a:rPr>
+              <a:t>"Chess 18"</a:t>
+            </a:r>
+            <a:r>
+              <a:rPr sz="2400" b="0">
+                <a:solidFill>
+                  <a:srgbClr val="080808"/>
+                </a:solidFill>
+                <a:latin typeface="Calibri"/>
+                <a:ea typeface="Calibri"/>
+                <a:cs typeface="Calibri"/>
+              </a:rPr>
+              <a:t> and </a:t>
+            </a:r>
+            <a:r>
+              <a:rPr sz="2050" b="0">
                 <a:solidFill>
                   <a:srgbClr val="067D17"/>
                 </a:solidFill>
@@ -8720,7 +8889,7 @@
         </p:spPr>
         <p:txBody>
           <a:bodyPr xmlns:a="http://schemas.openxmlformats.org/drawingml/2006/main">
-            <a:normAutofit fontScale="81195"/>
+            <a:normAutofit fontScale="100000"/>
           </a:bodyPr>
           <a:lstStyle xmlns:a="http://schemas.openxmlformats.org/drawingml/2006/main"/>
           <a:p xmlns:a="http://schemas.openxmlformats.org/drawingml/2006/main">
@@ -8739,18 +8908,18 @@
                 <a:ea typeface="Calibri"/>
                 <a:cs typeface="Calibri"/>
               </a:rPr>
-              <a:t>Store [</a:t>
-            </a:r>
-            <a:r>
-              <a:rPr sz="2400" b="0">
-                <a:solidFill>
-                  <a:srgbClr val="067D17"/>
-                </a:solidFill>
-                <a:latin typeface="JetBrains Mono"/>
-                <a:ea typeface="JetBrains Mono"/>
-                <a:cs typeface="JetBrains Mono"/>
-              </a:rPr>
-              <a:t>'Talk'</a:t>
+              <a:t>Create a 2D </a:t>
+            </a:r>
+            <a:r>
+              <a:rPr sz="2050" b="0">
+                <a:solidFill>
+                  <a:srgbClr val="1750EB"/>
+                </a:solidFill>
+                <a:latin typeface="JetBrains Mono"/>
+                <a:ea typeface="JetBrains Mono"/>
+                <a:cs typeface="JetBrains Mono"/>
+              </a:rPr>
+              <a:t>list</a:t>
             </a:r>
             <a:r>
               <a:rPr sz="2400" b="0">
@@ -8761,18 +8930,21 @@
                 <a:ea typeface="Calibri"/>
                 <a:cs typeface="Calibri"/>
               </a:rPr>
-              <a:t>, 1], [</a:t>
-            </a:r>
-            <a:r>
-              <a:rPr sz="2400" b="0">
-                <a:solidFill>
-                  <a:srgbClr val="067D17"/>
-                </a:solidFill>
-                <a:latin typeface="JetBrains Mono"/>
-                <a:ea typeface="JetBrains Mono"/>
-                <a:cs typeface="JetBrains Mono"/>
-              </a:rPr>
-              <a:t>'Quiz'</a:t>
+              <a:t> called </a:t>
+            </a:r>
+            <a:r>
+              <a:rPr sz="2050" b="0">
+                <a:solidFill>
+                  <a:srgbClr val="6A1B9A"/>
+                </a:solidFill>
+                <a:highlight>
+                  <a:srgbClr val="ECEAF4"/>
+                </a:highlight>
+                <a:latin typeface="JetBrains Mono"/>
+                <a:ea typeface="JetBrains Mono"/>
+                <a:cs typeface="JetBrains Mono"/>
+              </a:rPr>
+              <a:t> schedule </a:t>
             </a:r>
             <a:r>
               <a:rPr sz="2400" b="0">
@@ -8783,10 +8955,10 @@
                 <a:ea typeface="Calibri"/>
                 <a:cs typeface="Calibri"/>
               </a:rPr>
-              <a:t>, 2] and [</a:t>
-            </a:r>
-            <a:r>
-              <a:rPr sz="2400" b="0">
+              <a:t> with rows [</a:t>
+            </a:r>
+            <a:r>
+              <a:rPr sz="2050" b="0">
                 <a:solidFill>
                   <a:srgbClr val="067D17"/>
                 </a:solidFill>
@@ -8794,7 +8966,7 @@
                 <a:ea typeface="JetBrains Mono"/>
                 <a:cs typeface="JetBrains Mono"/>
               </a:rPr>
-              <a:t>'Demo'</a:t>
+              <a:t>"Talk"</a:t>
             </a:r>
             <a:r>
               <a:rPr sz="2400" b="0">
@@ -8805,10 +8977,10 @@
                 <a:ea typeface="Calibri"/>
                 <a:cs typeface="Calibri"/>
               </a:rPr>
-              <a:t>, 3] in [schedule]. Ask for an insertion position, event and room, then insert the new [event, room] row at that position. Ask for a different position and delete that row from the enlarged schedule. Use a counter called [number] to display each remaining position, event and room. Test inserting [</a:t>
-            </a:r>
-            <a:r>
-              <a:rPr sz="2400" b="0">
+              <a:t>, 1], [</a:t>
+            </a:r>
+            <a:r>
+              <a:rPr sz="2050" b="0">
                 <a:solidFill>
                   <a:srgbClr val="067D17"/>
                 </a:solidFill>
@@ -8816,7 +8988,7 @@
                 <a:ea typeface="JetBrains Mono"/>
                 <a:cs typeface="JetBrains Mono"/>
               </a:rPr>
-              <a:t>'Workshop'</a:t>
+              <a:t>"Quiz"</a:t>
             </a:r>
             <a:r>
               <a:rPr sz="2400" b="0">
@@ -8827,10 +8999,10 @@
                 <a:ea typeface="Calibri"/>
                 <a:cs typeface="Calibri"/>
               </a:rPr>
-              <a:t>, 4] at position 1 and deleting position 3; display </a:t>
-            </a:r>
-            <a:r>
-              <a:rPr sz="2400" b="0">
+              <a:t>, 2] and [</a:t>
+            </a:r>
+            <a:r>
+              <a:rPr sz="2050" b="0">
                 <a:solidFill>
                   <a:srgbClr val="067D17"/>
                 </a:solidFill>
@@ -8838,7 +9010,7 @@
                 <a:ea typeface="JetBrains Mono"/>
                 <a:cs typeface="JetBrains Mono"/>
               </a:rPr>
-              <a:t>"0 Talk 1"</a:t>
+              <a:t>"Demo"</a:t>
             </a:r>
             <a:r>
               <a:rPr sz="2400" b="0">
@@ -8849,18 +9021,18 @@
                 <a:ea typeface="Calibri"/>
                 <a:cs typeface="Calibri"/>
               </a:rPr>
-              <a:t>, </a:t>
-            </a:r>
-            <a:r>
-              <a:rPr sz="2400" b="0">
-                <a:solidFill>
-                  <a:srgbClr val="067D17"/>
-                </a:solidFill>
-                <a:latin typeface="JetBrains Mono"/>
-                <a:ea typeface="JetBrains Mono"/>
-                <a:cs typeface="JetBrains Mono"/>
-              </a:rPr>
-              <a:t>"1 Workshop 4"</a:t>
+              <a:t>, 3]. Ask for a position, an event name and a whole-number room, then insert the new row. Ask for a position to delete and delete that row. Use a </a:t>
+            </a:r>
+            <a:r>
+              <a:rPr sz="2050" b="0">
+                <a:solidFill>
+                  <a:srgbClr val="1750EB"/>
+                </a:solidFill>
+                <a:latin typeface="JetBrains Mono"/>
+                <a:ea typeface="JetBrains Mono"/>
+                <a:cs typeface="JetBrains Mono"/>
+              </a:rPr>
+              <a:t>for</a:t>
             </a:r>
             <a:r>
               <a:rPr sz="2400" b="0">
@@ -8871,29 +9043,7 @@
                 <a:ea typeface="Calibri"/>
                 <a:cs typeface="Calibri"/>
               </a:rPr>
-              <a:t> and </a:t>
-            </a:r>
-            <a:r>
-              <a:rPr sz="2400" b="0">
-                <a:solidFill>
-                  <a:srgbClr val="067D17"/>
-                </a:solidFill>
-                <a:latin typeface="JetBrains Mono"/>
-                <a:ea typeface="JetBrains Mono"/>
-                <a:cs typeface="JetBrains Mono"/>
-              </a:rPr>
-              <a:t>"2 Quiz 2"</a:t>
-            </a:r>
-            <a:r>
-              <a:rPr sz="2400" b="0">
-                <a:solidFill>
-                  <a:srgbClr val="080808"/>
-                </a:solidFill>
-                <a:latin typeface="Calibri"/>
-                <a:ea typeface="Calibri"/>
-                <a:cs typeface="Calibri"/>
-              </a:rPr>
-              <a:t>.</a:t>
+              <a:t> loop to display each event and room.</a:t>
             </a:r>
           </a:p>
         </p:txBody>

--- a/Mapped Curriculum Lessons/Grade 8/Lesson 30 - Changing 2D List Rows/Changing 2D List Rows - Slides.pptx
+++ b/Mapped Curriculum Lessons/Grade 8/Lesson 30 - Changing 2D List Rows/Changing 2D List Rows - Slides.pptx
@@ -2,28 +2,28 @@
 <file path=ppt/presentation.xml><?xml version="1.0" encoding="utf-8"?>
 <p:presentation xmlns:p="http://schemas.openxmlformats.org/presentationml/2006/main" embedTrueTypeFonts="1" saveSubsetFonts="0">
   <p:sldMasterIdLst>
-    <p:sldMasterId xmlns:r="http://schemas.openxmlformats.org/officeDocument/2006/relationships" id="2147483648" r:id="Rbeda22e534df4eaa"/>
+    <p:sldMasterId xmlns:r="http://schemas.openxmlformats.org/officeDocument/2006/relationships" id="2147483648" r:id="Rc207c5cc744e4082"/>
   </p:sldMasterIdLst>
   <p:notesMasterIdLst>
-    <p:notesMasterId xmlns:r="http://schemas.openxmlformats.org/officeDocument/2006/relationships" r:id="Reb72087f228a424c"/>
+    <p:notesMasterId xmlns:r="http://schemas.openxmlformats.org/officeDocument/2006/relationships" r:id="R9ee2a5aba42141f5"/>
   </p:notesMasterIdLst>
   <p:sldIdLst>
-    <p:sldId xmlns:r="http://schemas.openxmlformats.org/officeDocument/2006/relationships" id="256" r:id="Rd8f75a7fb9204c65"/>
-    <p:sldId xmlns:r="http://schemas.openxmlformats.org/officeDocument/2006/relationships" id="257" r:id="Recacfcfecb2e4bc6"/>
-    <p:sldId xmlns:r="http://schemas.openxmlformats.org/officeDocument/2006/relationships" id="258" r:id="R7900b9bc0b54410a"/>
-    <p:sldId xmlns:r="http://schemas.openxmlformats.org/officeDocument/2006/relationships" id="259" r:id="R3f6ad1acf9da4a9a"/>
-    <p:sldId xmlns:r="http://schemas.openxmlformats.org/officeDocument/2006/relationships" id="260" r:id="R50e519b331ac49ee"/>
-    <p:sldId xmlns:r="http://schemas.openxmlformats.org/officeDocument/2006/relationships" id="261" r:id="R1a37ca32074b42ba"/>
-    <p:sldId xmlns:r="http://schemas.openxmlformats.org/officeDocument/2006/relationships" id="262" r:id="Rcb908bbec33c47c4"/>
-    <p:sldId xmlns:r="http://schemas.openxmlformats.org/officeDocument/2006/relationships" id="263" r:id="R82e1c551e46a4673"/>
-    <p:sldId xmlns:r="http://schemas.openxmlformats.org/officeDocument/2006/relationships" id="264" r:id="R54ac6cbe68d54f08"/>
+    <p:sldId xmlns:r="http://schemas.openxmlformats.org/officeDocument/2006/relationships" id="256" r:id="Rdd22b36c796e4d04"/>
+    <p:sldId xmlns:r="http://schemas.openxmlformats.org/officeDocument/2006/relationships" id="257" r:id="R3c1a2636ca7e4a4f"/>
+    <p:sldId xmlns:r="http://schemas.openxmlformats.org/officeDocument/2006/relationships" id="258" r:id="Ra431386bfc5b4e1d"/>
+    <p:sldId xmlns:r="http://schemas.openxmlformats.org/officeDocument/2006/relationships" id="259" r:id="R35bb0089bb864b1e"/>
+    <p:sldId xmlns:r="http://schemas.openxmlformats.org/officeDocument/2006/relationships" id="260" r:id="Rda4ec33750e34aaa"/>
+    <p:sldId xmlns:r="http://schemas.openxmlformats.org/officeDocument/2006/relationships" id="261" r:id="Rd8ebab93fb684225"/>
+    <p:sldId xmlns:r="http://schemas.openxmlformats.org/officeDocument/2006/relationships" id="262" r:id="R4c3e1b0a95ce4fb5"/>
+    <p:sldId xmlns:r="http://schemas.openxmlformats.org/officeDocument/2006/relationships" id="263" r:id="R1c77aa842d704eea"/>
+    <p:sldId xmlns:r="http://schemas.openxmlformats.org/officeDocument/2006/relationships" id="264" r:id="R5d547fc1d0cc4c5a"/>
   </p:sldIdLst>
   <p:sldSz cx="12192000" cy="6858000"/>
   <p:notesSz cx="6858000" cy="9144000"/>
   <p:embeddedFontLst>
     <p:embeddedFont>
       <p:font typeface="JetBrains Mono"/>
-      <p:regular xmlns:r="http://schemas.openxmlformats.org/officeDocument/2006/relationships" r:id="R6a9dd421594a4159"/>
+      <p:regular xmlns:r="http://schemas.openxmlformats.org/officeDocument/2006/relationships" r:id="Rd84b2987a9394d8a"/>
     </p:embeddedFont>
   </p:embeddedFontLst>
 </p:presentation>
@@ -1071,7 +1071,7 @@
           <p:nvPr/>
         </p:nvPicPr>
         <p:blipFill rotWithShape="1">
-          <a:blip xmlns:r="http://schemas.openxmlformats.org/officeDocument/2006/relationships" xmlns:a="http://schemas.openxmlformats.org/drawingml/2006/main" r:embed="R96d4fa1dcfed4ece"/>
+          <a:blip xmlns:r="http://schemas.openxmlformats.org/officeDocument/2006/relationships" xmlns:a="http://schemas.openxmlformats.org/drawingml/2006/main" r:embed="R2f5f04cec56b48c9"/>
           <a:stretch xmlns:a="http://schemas.openxmlformats.org/drawingml/2006/main"/>
         </p:blipFill>
         <p:spPr>
@@ -1451,7 +1451,7 @@
           <p:nvPr/>
         </p:nvPicPr>
         <p:blipFill rotWithShape="1">
-          <a:blip xmlns:r="http://schemas.openxmlformats.org/officeDocument/2006/relationships" xmlns:a="http://schemas.openxmlformats.org/drawingml/2006/main" r:embed="R93d675c441d44de8">
+          <a:blip xmlns:r="http://schemas.openxmlformats.org/officeDocument/2006/relationships" xmlns:a="http://schemas.openxmlformats.org/drawingml/2006/main" r:embed="R1b474f57f9e749ea">
             <a:alphaModFix amt="28000"/>
           </a:blip>
           <a:stretch xmlns:a="http://schemas.openxmlformats.org/drawingml/2006/main"/>
@@ -1664,7 +1664,7 @@
           <p:nvPr/>
         </p:nvPicPr>
         <p:blipFill rotWithShape="1">
-          <a:blip xmlns:r="http://schemas.openxmlformats.org/officeDocument/2006/relationships" xmlns:a="http://schemas.openxmlformats.org/drawingml/2006/main" r:embed="R8a421a1bd9b94991">
+          <a:blip xmlns:r="http://schemas.openxmlformats.org/officeDocument/2006/relationships" xmlns:a="http://schemas.openxmlformats.org/drawingml/2006/main" r:embed="R1a27d0fc8d0a4940">
             <a:alphaModFix amt="28000"/>
           </a:blip>
           <a:stretch xmlns:a="http://schemas.openxmlformats.org/drawingml/2006/main"/>
@@ -1899,7 +1899,7 @@
           <p:nvPr/>
         </p:nvPicPr>
         <p:blipFill rotWithShape="1">
-          <a:blip xmlns:r="http://schemas.openxmlformats.org/officeDocument/2006/relationships" xmlns:a="http://schemas.openxmlformats.org/drawingml/2006/main" r:embed="Rb43a246f0d484099">
+          <a:blip xmlns:r="http://schemas.openxmlformats.org/officeDocument/2006/relationships" xmlns:a="http://schemas.openxmlformats.org/drawingml/2006/main" r:embed="Rb20b68a45bcf4963">
             <a:alphaModFix amt="28000"/>
           </a:blip>
           <a:stretch xmlns:a="http://schemas.openxmlformats.org/drawingml/2006/main"/>
@@ -2176,7 +2176,7 @@
           <p:nvPr/>
         </p:nvPicPr>
         <p:blipFill rotWithShape="1">
-          <a:blip xmlns:r="http://schemas.openxmlformats.org/officeDocument/2006/relationships" xmlns:a="http://schemas.openxmlformats.org/drawingml/2006/main" r:embed="R4116e4c40704485b">
+          <a:blip xmlns:r="http://schemas.openxmlformats.org/officeDocument/2006/relationships" xmlns:a="http://schemas.openxmlformats.org/drawingml/2006/main" r:embed="Rbe7720ae416c4817">
             <a:alphaModFix amt="28000"/>
           </a:blip>
           <a:stretch xmlns:a="http://schemas.openxmlformats.org/drawingml/2006/main"/>
@@ -2451,7 +2451,7 @@
           <p:nvPr/>
         </p:nvPicPr>
         <p:blipFill rotWithShape="1">
-          <a:blip xmlns:r="http://schemas.openxmlformats.org/officeDocument/2006/relationships" xmlns:a="http://schemas.openxmlformats.org/drawingml/2006/main" r:embed="R9f96dd29aff64046">
+          <a:blip xmlns:r="http://schemas.openxmlformats.org/officeDocument/2006/relationships" xmlns:a="http://schemas.openxmlformats.org/drawingml/2006/main" r:embed="R28442596828a496f">
             <a:alphaModFix amt="28000"/>
           </a:blip>
           <a:stretch xmlns:a="http://schemas.openxmlformats.org/drawingml/2006/main"/>
@@ -2875,7 +2875,7 @@
           <p:nvPr/>
         </p:nvPicPr>
         <p:blipFill rotWithShape="1">
-          <a:blip xmlns:r="http://schemas.openxmlformats.org/officeDocument/2006/relationships" xmlns:a="http://schemas.openxmlformats.org/drawingml/2006/main" r:embed="R055b47b1207e4fd7">
+          <a:blip xmlns:r="http://schemas.openxmlformats.org/officeDocument/2006/relationships" xmlns:a="http://schemas.openxmlformats.org/drawingml/2006/main" r:embed="Rcdd260447312449d">
             <a:alphaModFix amt="28000"/>
           </a:blip>
           <a:stretch xmlns:a="http://schemas.openxmlformats.org/drawingml/2006/main"/>
@@ -3016,7 +3016,7 @@
           <p:nvPr/>
         </p:nvPicPr>
         <p:blipFill rotWithShape="1">
-          <a:blip xmlns:r="http://schemas.openxmlformats.org/officeDocument/2006/relationships" xmlns:a="http://schemas.openxmlformats.org/drawingml/2006/main" r:embed="Rf7e37151e86f4f2f">
+          <a:blip xmlns:r="http://schemas.openxmlformats.org/officeDocument/2006/relationships" xmlns:a="http://schemas.openxmlformats.org/drawingml/2006/main" r:embed="R2898d25ee33f45be">
             <a:alphaModFix amt="28000"/>
           </a:blip>
           <a:stretch xmlns:a="http://schemas.openxmlformats.org/drawingml/2006/main"/>
@@ -3130,7 +3130,7 @@
           <p:nvPr/>
         </p:nvPicPr>
         <p:blipFill rotWithShape="1">
-          <a:blip xmlns:r="http://schemas.openxmlformats.org/officeDocument/2006/relationships" xmlns:a="http://schemas.openxmlformats.org/drawingml/2006/main" r:embed="R7ac49de4f2a2447a">
+          <a:blip xmlns:r="http://schemas.openxmlformats.org/officeDocument/2006/relationships" xmlns:a="http://schemas.openxmlformats.org/drawingml/2006/main" r:embed="R3c93c1f57ebc4eda">
             <a:alphaModFix amt="28000"/>
           </a:blip>
           <a:stretch xmlns:a="http://schemas.openxmlformats.org/drawingml/2006/main"/>
@@ -3457,7 +3457,7 @@
           <p:nvPr/>
         </p:nvPicPr>
         <p:blipFill rotWithShape="1">
-          <a:blip xmlns:r="http://schemas.openxmlformats.org/officeDocument/2006/relationships" xmlns:a="http://schemas.openxmlformats.org/drawingml/2006/main" r:embed="R3aabeb21e60549d6">
+          <a:blip xmlns:r="http://schemas.openxmlformats.org/officeDocument/2006/relationships" xmlns:a="http://schemas.openxmlformats.org/drawingml/2006/main" r:embed="R4f35a6d543bf4161">
             <a:alphaModFix amt="28000"/>
           </a:blip>
           <a:stretch xmlns:a="http://schemas.openxmlformats.org/drawingml/2006/main"/>
@@ -3745,7 +3745,7 @@
           <p:nvPr/>
         </p:nvPicPr>
         <p:blipFill rotWithShape="1">
-          <a:blip xmlns:r="http://schemas.openxmlformats.org/officeDocument/2006/relationships" xmlns:a="http://schemas.openxmlformats.org/drawingml/2006/main" r:embed="Rdf1810310cea459b">
+          <a:blip xmlns:r="http://schemas.openxmlformats.org/officeDocument/2006/relationships" xmlns:a="http://schemas.openxmlformats.org/drawingml/2006/main" r:embed="R2d3d6bafc0e540e2">
             <a:alphaModFix amt="28000"/>
           </a:blip>
           <a:stretch xmlns:a="http://schemas.openxmlformats.org/drawingml/2006/main"/>
@@ -3982,17 +3982,17 @@
   </p:cSld>
   <p:clrMap bg1="lt1" tx1="dk1" bg2="lt2" tx2="dk2" accent1="accent1" accent2="accent2" accent3="accent3" accent4="accent4" accent5="accent5" accent6="accent6" hlink="hlink" folHlink="folHlink"/>
   <p:sldLayoutIdLst>
-    <p:sldLayoutId xmlns:r="http://schemas.openxmlformats.org/officeDocument/2006/relationships" id="2147483649" r:id="Rceecf09c438f4e90"/>
-    <p:sldLayoutId xmlns:r="http://schemas.openxmlformats.org/officeDocument/2006/relationships" id="2147483650" r:id="Rcae9d04c0c4440be"/>
-    <p:sldLayoutId xmlns:r="http://schemas.openxmlformats.org/officeDocument/2006/relationships" id="2147483651" r:id="Rcea51b50be794869"/>
-    <p:sldLayoutId xmlns:r="http://schemas.openxmlformats.org/officeDocument/2006/relationships" id="2147483652" r:id="Rc63113262672420b"/>
-    <p:sldLayoutId xmlns:r="http://schemas.openxmlformats.org/officeDocument/2006/relationships" id="2147483653" r:id="R30a8a99b462f4421"/>
-    <p:sldLayoutId xmlns:r="http://schemas.openxmlformats.org/officeDocument/2006/relationships" id="2147483654" r:id="R52a84259181848af"/>
-    <p:sldLayoutId xmlns:r="http://schemas.openxmlformats.org/officeDocument/2006/relationships" id="2147483655" r:id="R56249d390e114068"/>
-    <p:sldLayoutId xmlns:r="http://schemas.openxmlformats.org/officeDocument/2006/relationships" id="2147483656" r:id="Rb6ef7f99300b459c"/>
-    <p:sldLayoutId xmlns:r="http://schemas.openxmlformats.org/officeDocument/2006/relationships" id="2147483657" r:id="R5b8f9ffdaa274eb0"/>
-    <p:sldLayoutId xmlns:r="http://schemas.openxmlformats.org/officeDocument/2006/relationships" id="2147483658" r:id="R9c94f16fb8174c3b"/>
-    <p:sldLayoutId xmlns:r="http://schemas.openxmlformats.org/officeDocument/2006/relationships" id="2147483659" r:id="Rd8eac2aacb5f4c94"/>
+    <p:sldLayoutId xmlns:r="http://schemas.openxmlformats.org/officeDocument/2006/relationships" id="2147483649" r:id="R578fa7e37a7e4e12"/>
+    <p:sldLayoutId xmlns:r="http://schemas.openxmlformats.org/officeDocument/2006/relationships" id="2147483650" r:id="R74a1813afbd34c75"/>
+    <p:sldLayoutId xmlns:r="http://schemas.openxmlformats.org/officeDocument/2006/relationships" id="2147483651" r:id="Racf1efe4efce40fa"/>
+    <p:sldLayoutId xmlns:r="http://schemas.openxmlformats.org/officeDocument/2006/relationships" id="2147483652" r:id="Re31c7708783f49f2"/>
+    <p:sldLayoutId xmlns:r="http://schemas.openxmlformats.org/officeDocument/2006/relationships" id="2147483653" r:id="R92f64a5b963e4c8f"/>
+    <p:sldLayoutId xmlns:r="http://schemas.openxmlformats.org/officeDocument/2006/relationships" id="2147483654" r:id="R294ef00d343e4444"/>
+    <p:sldLayoutId xmlns:r="http://schemas.openxmlformats.org/officeDocument/2006/relationships" id="2147483655" r:id="R75e8013e51874c1e"/>
+    <p:sldLayoutId xmlns:r="http://schemas.openxmlformats.org/officeDocument/2006/relationships" id="2147483656" r:id="Re0c49e8bc99440f3"/>
+    <p:sldLayoutId xmlns:r="http://schemas.openxmlformats.org/officeDocument/2006/relationships" id="2147483657" r:id="R747e6aebbe314bfd"/>
+    <p:sldLayoutId xmlns:r="http://schemas.openxmlformats.org/officeDocument/2006/relationships" id="2147483658" r:id="Rb009d5a9a9fd4130"/>
+    <p:sldLayoutId xmlns:r="http://schemas.openxmlformats.org/officeDocument/2006/relationships" id="2147483659" r:id="Rea233914abb74612"/>
   </p:sldLayoutIdLst>
   <p:hf hdr="0" ftr="0" dt="0"/>
   <p:txStyles>
@@ -5103,7 +5103,7 @@
             <a:r>
               <a:rPr sz="2400">
                 <a:solidFill>
-                  <a:srgbClr val="1750EB"/>
+                  <a:srgbClr val="C45E00"/>
                 </a:solidFill>
                 <a:latin typeface="JetBrains Mono"/>
                 <a:ea typeface="JetBrains Mono"/>
@@ -5125,7 +5125,7 @@
             <a:r>
               <a:rPr sz="2400">
                 <a:solidFill>
-                  <a:srgbClr val="1750EB"/>
+                  <a:srgbClr val="C45E00"/>
                 </a:solidFill>
                 <a:latin typeface="JetBrains Mono"/>
                 <a:ea typeface="JetBrains Mono"/>
@@ -5678,7 +5678,7 @@
             <a:r>
               <a:rPr sz="2400">
                 <a:solidFill>
-                  <a:srgbClr val="1750EB"/>
+                  <a:srgbClr val="C45E00"/>
                 </a:solidFill>
                 <a:latin typeface="JetBrains Mono"/>
                 <a:ea typeface="JetBrains Mono"/>
@@ -5700,7 +5700,7 @@
             <a:r>
               <a:rPr sz="2400">
                 <a:solidFill>
-                  <a:srgbClr val="1750EB"/>
+                  <a:srgbClr val="C45E00"/>
                 </a:solidFill>
                 <a:latin typeface="JetBrains Mono"/>
                 <a:ea typeface="JetBrains Mono"/>
@@ -6253,7 +6253,7 @@
             <a:r>
               <a:rPr sz="2400">
                 <a:solidFill>
-                  <a:srgbClr val="1750EB"/>
+                  <a:srgbClr val="C45E00"/>
                 </a:solidFill>
                 <a:latin typeface="JetBrains Mono"/>
                 <a:ea typeface="JetBrains Mono"/>
@@ -6275,7 +6275,7 @@
             <a:r>
               <a:rPr sz="2400">
                 <a:solidFill>
-                  <a:srgbClr val="1750EB"/>
+                  <a:srgbClr val="C45E00"/>
                 </a:solidFill>
                 <a:latin typeface="JetBrains Mono"/>
                 <a:ea typeface="JetBrains Mono"/>
@@ -7089,7 +7089,7 @@
             <a:r>
               <a:rPr sz="1400">
                 <a:solidFill>
-                  <a:srgbClr val="1750EB"/>
+                  <a:srgbClr val="C45E00"/>
                 </a:solidFill>
                 <a:latin typeface="JetBrains Mono"/>
                 <a:ea typeface="JetBrains Mono"/>
@@ -7111,7 +7111,7 @@
             <a:r>
               <a:rPr sz="1400">
                 <a:solidFill>
-                  <a:srgbClr val="1750EB"/>
+                  <a:srgbClr val="C45E00"/>
                 </a:solidFill>
                 <a:latin typeface="JetBrains Mono"/>
                 <a:ea typeface="JetBrains Mono"/>
@@ -7882,7 +7882,7 @@
             <a:r>
               <a:rPr sz="1400">
                 <a:solidFill>
-                  <a:srgbClr val="1750EB"/>
+                  <a:srgbClr val="C45E00"/>
                 </a:solidFill>
                 <a:latin typeface="JetBrains Mono"/>
                 <a:ea typeface="JetBrains Mono"/>
@@ -7904,7 +7904,7 @@
             <a:r>
               <a:rPr sz="1400">
                 <a:solidFill>
-                  <a:srgbClr val="1750EB"/>
+                  <a:srgbClr val="C45E00"/>
                 </a:solidFill>
                 <a:latin typeface="JetBrains Mono"/>
                 <a:ea typeface="JetBrains Mono"/>
@@ -8148,7 +8148,7 @@
             <a:r>
               <a:rPr sz="2050" b="0">
                 <a:solidFill>
-                  <a:srgbClr val="1750EB"/>
+                  <a:srgbClr val="C45E00"/>
                 </a:solidFill>
                 <a:latin typeface="JetBrains Mono"/>
                 <a:ea typeface="JetBrains Mono"/>
@@ -8722,7 +8722,7 @@
             <a:r>
               <a:rPr sz="1400">
                 <a:solidFill>
-                  <a:srgbClr val="1750EB"/>
+                  <a:srgbClr val="C45E00"/>
                 </a:solidFill>
                 <a:latin typeface="JetBrains Mono"/>
                 <a:ea typeface="JetBrains Mono"/>
@@ -8744,7 +8744,7 @@
             <a:r>
               <a:rPr sz="1400">
                 <a:solidFill>
-                  <a:srgbClr val="1750EB"/>
+                  <a:srgbClr val="C45E00"/>
                 </a:solidFill>
                 <a:latin typeface="JetBrains Mono"/>
                 <a:ea typeface="JetBrains Mono"/>
@@ -9026,7 +9026,7 @@
             <a:r>
               <a:rPr sz="2050" b="0">
                 <a:solidFill>
-                  <a:srgbClr val="1750EB"/>
+                  <a:srgbClr val="C45E00"/>
                 </a:solidFill>
                 <a:latin typeface="JetBrains Mono"/>
                 <a:ea typeface="JetBrains Mono"/>
@@ -9534,7 +9534,7 @@
             <a:r>
               <a:rPr sz="1400">
                 <a:solidFill>
-                  <a:srgbClr val="1750EB"/>
+                  <a:srgbClr val="C45E00"/>
                 </a:solidFill>
                 <a:latin typeface="JetBrains Mono"/>
                 <a:ea typeface="JetBrains Mono"/>
@@ -9556,7 +9556,7 @@
             <a:r>
               <a:rPr sz="1400">
                 <a:solidFill>
-                  <a:srgbClr val="1750EB"/>
+                  <a:srgbClr val="C45E00"/>
                 </a:solidFill>
                 <a:latin typeface="JetBrains Mono"/>
                 <a:ea typeface="JetBrains Mono"/>

--- a/Mapped Curriculum Lessons/Grade 8/Lesson 30 - Changing 2D List Rows/Changing 2D List Rows - Slides.pptx
+++ b/Mapped Curriculum Lessons/Grade 8/Lesson 30 - Changing 2D List Rows/Changing 2D List Rows - Slides.pptx
@@ -2,28 +2,28 @@
 <file path=ppt/presentation.xml><?xml version="1.0" encoding="utf-8"?>
 <p:presentation xmlns:p="http://schemas.openxmlformats.org/presentationml/2006/main" embedTrueTypeFonts="1" saveSubsetFonts="0">
   <p:sldMasterIdLst>
-    <p:sldMasterId xmlns:r="http://schemas.openxmlformats.org/officeDocument/2006/relationships" id="2147483648" r:id="Rc207c5cc744e4082"/>
+    <p:sldMasterId xmlns:r="http://schemas.openxmlformats.org/officeDocument/2006/relationships" id="2147483648" r:id="R90eccc48b35949b0"/>
   </p:sldMasterIdLst>
   <p:notesMasterIdLst>
-    <p:notesMasterId xmlns:r="http://schemas.openxmlformats.org/officeDocument/2006/relationships" r:id="R9ee2a5aba42141f5"/>
+    <p:notesMasterId xmlns:r="http://schemas.openxmlformats.org/officeDocument/2006/relationships" r:id="Rfa8f3e3467e342e7"/>
   </p:notesMasterIdLst>
   <p:sldIdLst>
-    <p:sldId xmlns:r="http://schemas.openxmlformats.org/officeDocument/2006/relationships" id="256" r:id="Rdd22b36c796e4d04"/>
-    <p:sldId xmlns:r="http://schemas.openxmlformats.org/officeDocument/2006/relationships" id="257" r:id="R3c1a2636ca7e4a4f"/>
-    <p:sldId xmlns:r="http://schemas.openxmlformats.org/officeDocument/2006/relationships" id="258" r:id="Ra431386bfc5b4e1d"/>
-    <p:sldId xmlns:r="http://schemas.openxmlformats.org/officeDocument/2006/relationships" id="259" r:id="R35bb0089bb864b1e"/>
-    <p:sldId xmlns:r="http://schemas.openxmlformats.org/officeDocument/2006/relationships" id="260" r:id="Rda4ec33750e34aaa"/>
-    <p:sldId xmlns:r="http://schemas.openxmlformats.org/officeDocument/2006/relationships" id="261" r:id="Rd8ebab93fb684225"/>
-    <p:sldId xmlns:r="http://schemas.openxmlformats.org/officeDocument/2006/relationships" id="262" r:id="R4c3e1b0a95ce4fb5"/>
-    <p:sldId xmlns:r="http://schemas.openxmlformats.org/officeDocument/2006/relationships" id="263" r:id="R1c77aa842d704eea"/>
-    <p:sldId xmlns:r="http://schemas.openxmlformats.org/officeDocument/2006/relationships" id="264" r:id="R5d547fc1d0cc4c5a"/>
+    <p:sldId xmlns:r="http://schemas.openxmlformats.org/officeDocument/2006/relationships" id="256" r:id="Rf2bfaaaea6fa48de"/>
+    <p:sldId xmlns:r="http://schemas.openxmlformats.org/officeDocument/2006/relationships" id="257" r:id="R192db6ca800d49d4"/>
+    <p:sldId xmlns:r="http://schemas.openxmlformats.org/officeDocument/2006/relationships" id="258" r:id="Rff6f24d004a14b61"/>
+    <p:sldId xmlns:r="http://schemas.openxmlformats.org/officeDocument/2006/relationships" id="259" r:id="R7786925c9177478a"/>
+    <p:sldId xmlns:r="http://schemas.openxmlformats.org/officeDocument/2006/relationships" id="260" r:id="R48410271088e4d7a"/>
+    <p:sldId xmlns:r="http://schemas.openxmlformats.org/officeDocument/2006/relationships" id="261" r:id="R61d464f2f31847cf"/>
+    <p:sldId xmlns:r="http://schemas.openxmlformats.org/officeDocument/2006/relationships" id="262" r:id="R3f1077b00eb04668"/>
+    <p:sldId xmlns:r="http://schemas.openxmlformats.org/officeDocument/2006/relationships" id="263" r:id="Rc8beccc5757b4e07"/>
+    <p:sldId xmlns:r="http://schemas.openxmlformats.org/officeDocument/2006/relationships" id="264" r:id="R0df94ccaef1140db"/>
   </p:sldIdLst>
   <p:sldSz cx="12192000" cy="6858000"/>
   <p:notesSz cx="6858000" cy="9144000"/>
   <p:embeddedFontLst>
     <p:embeddedFont>
       <p:font typeface="JetBrains Mono"/>
-      <p:regular xmlns:r="http://schemas.openxmlformats.org/officeDocument/2006/relationships" r:id="Rd84b2987a9394d8a"/>
+      <p:regular xmlns:r="http://schemas.openxmlformats.org/officeDocument/2006/relationships" r:id="Rd01db7a7274248c6"/>
     </p:embeddedFont>
   </p:embeddedFontLst>
 </p:presentation>
@@ -1071,7 +1071,7 @@
           <p:nvPr/>
         </p:nvPicPr>
         <p:blipFill rotWithShape="1">
-          <a:blip xmlns:r="http://schemas.openxmlformats.org/officeDocument/2006/relationships" xmlns:a="http://schemas.openxmlformats.org/drawingml/2006/main" r:embed="R2f5f04cec56b48c9"/>
+          <a:blip xmlns:r="http://schemas.openxmlformats.org/officeDocument/2006/relationships" xmlns:a="http://schemas.openxmlformats.org/drawingml/2006/main" r:embed="Rcac72d4dda664868"/>
           <a:stretch xmlns:a="http://schemas.openxmlformats.org/drawingml/2006/main"/>
         </p:blipFill>
         <p:spPr>
@@ -1451,7 +1451,7 @@
           <p:nvPr/>
         </p:nvPicPr>
         <p:blipFill rotWithShape="1">
-          <a:blip xmlns:r="http://schemas.openxmlformats.org/officeDocument/2006/relationships" xmlns:a="http://schemas.openxmlformats.org/drawingml/2006/main" r:embed="R1b474f57f9e749ea">
+          <a:blip xmlns:r="http://schemas.openxmlformats.org/officeDocument/2006/relationships" xmlns:a="http://schemas.openxmlformats.org/drawingml/2006/main" r:embed="R06c94114aa0e433f">
             <a:alphaModFix amt="28000"/>
           </a:blip>
           <a:stretch xmlns:a="http://schemas.openxmlformats.org/drawingml/2006/main"/>
@@ -1664,7 +1664,7 @@
           <p:nvPr/>
         </p:nvPicPr>
         <p:blipFill rotWithShape="1">
-          <a:blip xmlns:r="http://schemas.openxmlformats.org/officeDocument/2006/relationships" xmlns:a="http://schemas.openxmlformats.org/drawingml/2006/main" r:embed="R1a27d0fc8d0a4940">
+          <a:blip xmlns:r="http://schemas.openxmlformats.org/officeDocument/2006/relationships" xmlns:a="http://schemas.openxmlformats.org/drawingml/2006/main" r:embed="R79ad4f2622784aad">
             <a:alphaModFix amt="28000"/>
           </a:blip>
           <a:stretch xmlns:a="http://schemas.openxmlformats.org/drawingml/2006/main"/>
@@ -1899,7 +1899,7 @@
           <p:nvPr/>
         </p:nvPicPr>
         <p:blipFill rotWithShape="1">
-          <a:blip xmlns:r="http://schemas.openxmlformats.org/officeDocument/2006/relationships" xmlns:a="http://schemas.openxmlformats.org/drawingml/2006/main" r:embed="Rb20b68a45bcf4963">
+          <a:blip xmlns:r="http://schemas.openxmlformats.org/officeDocument/2006/relationships" xmlns:a="http://schemas.openxmlformats.org/drawingml/2006/main" r:embed="R5b46ab87f35a49e2">
             <a:alphaModFix amt="28000"/>
           </a:blip>
           <a:stretch xmlns:a="http://schemas.openxmlformats.org/drawingml/2006/main"/>
@@ -2176,7 +2176,7 @@
           <p:nvPr/>
         </p:nvPicPr>
         <p:blipFill rotWithShape="1">
-          <a:blip xmlns:r="http://schemas.openxmlformats.org/officeDocument/2006/relationships" xmlns:a="http://schemas.openxmlformats.org/drawingml/2006/main" r:embed="Rbe7720ae416c4817">
+          <a:blip xmlns:r="http://schemas.openxmlformats.org/officeDocument/2006/relationships" xmlns:a="http://schemas.openxmlformats.org/drawingml/2006/main" r:embed="R311b88a61ba84cb0">
             <a:alphaModFix amt="28000"/>
           </a:blip>
           <a:stretch xmlns:a="http://schemas.openxmlformats.org/drawingml/2006/main"/>
@@ -2451,7 +2451,7 @@
           <p:nvPr/>
         </p:nvPicPr>
         <p:blipFill rotWithShape="1">
-          <a:blip xmlns:r="http://schemas.openxmlformats.org/officeDocument/2006/relationships" xmlns:a="http://schemas.openxmlformats.org/drawingml/2006/main" r:embed="R28442596828a496f">
+          <a:blip xmlns:r="http://schemas.openxmlformats.org/officeDocument/2006/relationships" xmlns:a="http://schemas.openxmlformats.org/drawingml/2006/main" r:embed="R05d30e0f57d247ad">
             <a:alphaModFix amt="28000"/>
           </a:blip>
           <a:stretch xmlns:a="http://schemas.openxmlformats.org/drawingml/2006/main"/>
@@ -2875,7 +2875,7 @@
           <p:nvPr/>
         </p:nvPicPr>
         <p:blipFill rotWithShape="1">
-          <a:blip xmlns:r="http://schemas.openxmlformats.org/officeDocument/2006/relationships" xmlns:a="http://schemas.openxmlformats.org/drawingml/2006/main" r:embed="Rcdd260447312449d">
+          <a:blip xmlns:r="http://schemas.openxmlformats.org/officeDocument/2006/relationships" xmlns:a="http://schemas.openxmlformats.org/drawingml/2006/main" r:embed="R3ffc7d5f747d42c8">
             <a:alphaModFix amt="28000"/>
           </a:blip>
           <a:stretch xmlns:a="http://schemas.openxmlformats.org/drawingml/2006/main"/>
@@ -3016,7 +3016,7 @@
           <p:nvPr/>
         </p:nvPicPr>
         <p:blipFill rotWithShape="1">
-          <a:blip xmlns:r="http://schemas.openxmlformats.org/officeDocument/2006/relationships" xmlns:a="http://schemas.openxmlformats.org/drawingml/2006/main" r:embed="R2898d25ee33f45be">
+          <a:blip xmlns:r="http://schemas.openxmlformats.org/officeDocument/2006/relationships" xmlns:a="http://schemas.openxmlformats.org/drawingml/2006/main" r:embed="R7656d44a80ef44e3">
             <a:alphaModFix amt="28000"/>
           </a:blip>
           <a:stretch xmlns:a="http://schemas.openxmlformats.org/drawingml/2006/main"/>
@@ -3130,7 +3130,7 @@
           <p:nvPr/>
         </p:nvPicPr>
         <p:blipFill rotWithShape="1">
-          <a:blip xmlns:r="http://schemas.openxmlformats.org/officeDocument/2006/relationships" xmlns:a="http://schemas.openxmlformats.org/drawingml/2006/main" r:embed="R3c93c1f57ebc4eda">
+          <a:blip xmlns:r="http://schemas.openxmlformats.org/officeDocument/2006/relationships" xmlns:a="http://schemas.openxmlformats.org/drawingml/2006/main" r:embed="R68b53c303935443f">
             <a:alphaModFix amt="28000"/>
           </a:blip>
           <a:stretch xmlns:a="http://schemas.openxmlformats.org/drawingml/2006/main"/>
@@ -3457,7 +3457,7 @@
           <p:nvPr/>
         </p:nvPicPr>
         <p:blipFill rotWithShape="1">
-          <a:blip xmlns:r="http://schemas.openxmlformats.org/officeDocument/2006/relationships" xmlns:a="http://schemas.openxmlformats.org/drawingml/2006/main" r:embed="R4f35a6d543bf4161">
+          <a:blip xmlns:r="http://schemas.openxmlformats.org/officeDocument/2006/relationships" xmlns:a="http://schemas.openxmlformats.org/drawingml/2006/main" r:embed="Rcb9e6b5348914c15">
             <a:alphaModFix amt="28000"/>
           </a:blip>
           <a:stretch xmlns:a="http://schemas.openxmlformats.org/drawingml/2006/main"/>
@@ -3745,7 +3745,7 @@
           <p:nvPr/>
         </p:nvPicPr>
         <p:blipFill rotWithShape="1">
-          <a:blip xmlns:r="http://schemas.openxmlformats.org/officeDocument/2006/relationships" xmlns:a="http://schemas.openxmlformats.org/drawingml/2006/main" r:embed="R2d3d6bafc0e540e2">
+          <a:blip xmlns:r="http://schemas.openxmlformats.org/officeDocument/2006/relationships" xmlns:a="http://schemas.openxmlformats.org/drawingml/2006/main" r:embed="R79982c941753475c">
             <a:alphaModFix amt="28000"/>
           </a:blip>
           <a:stretch xmlns:a="http://schemas.openxmlformats.org/drawingml/2006/main"/>
@@ -3982,17 +3982,17 @@
   </p:cSld>
   <p:clrMap bg1="lt1" tx1="dk1" bg2="lt2" tx2="dk2" accent1="accent1" accent2="accent2" accent3="accent3" accent4="accent4" accent5="accent5" accent6="accent6" hlink="hlink" folHlink="folHlink"/>
   <p:sldLayoutIdLst>
-    <p:sldLayoutId xmlns:r="http://schemas.openxmlformats.org/officeDocument/2006/relationships" id="2147483649" r:id="R578fa7e37a7e4e12"/>
-    <p:sldLayoutId xmlns:r="http://schemas.openxmlformats.org/officeDocument/2006/relationships" id="2147483650" r:id="R74a1813afbd34c75"/>
-    <p:sldLayoutId xmlns:r="http://schemas.openxmlformats.org/officeDocument/2006/relationships" id="2147483651" r:id="Racf1efe4efce40fa"/>
-    <p:sldLayoutId xmlns:r="http://schemas.openxmlformats.org/officeDocument/2006/relationships" id="2147483652" r:id="Re31c7708783f49f2"/>
-    <p:sldLayoutId xmlns:r="http://schemas.openxmlformats.org/officeDocument/2006/relationships" id="2147483653" r:id="R92f64a5b963e4c8f"/>
-    <p:sldLayoutId xmlns:r="http://schemas.openxmlformats.org/officeDocument/2006/relationships" id="2147483654" r:id="R294ef00d343e4444"/>
-    <p:sldLayoutId xmlns:r="http://schemas.openxmlformats.org/officeDocument/2006/relationships" id="2147483655" r:id="R75e8013e51874c1e"/>
-    <p:sldLayoutId xmlns:r="http://schemas.openxmlformats.org/officeDocument/2006/relationships" id="2147483656" r:id="Re0c49e8bc99440f3"/>
-    <p:sldLayoutId xmlns:r="http://schemas.openxmlformats.org/officeDocument/2006/relationships" id="2147483657" r:id="R747e6aebbe314bfd"/>
-    <p:sldLayoutId xmlns:r="http://schemas.openxmlformats.org/officeDocument/2006/relationships" id="2147483658" r:id="Rb009d5a9a9fd4130"/>
-    <p:sldLayoutId xmlns:r="http://schemas.openxmlformats.org/officeDocument/2006/relationships" id="2147483659" r:id="Rea233914abb74612"/>
+    <p:sldLayoutId xmlns:r="http://schemas.openxmlformats.org/officeDocument/2006/relationships" id="2147483649" r:id="Rd688c353d5664a4f"/>
+    <p:sldLayoutId xmlns:r="http://schemas.openxmlformats.org/officeDocument/2006/relationships" id="2147483650" r:id="R0cc0fca7c4564b01"/>
+    <p:sldLayoutId xmlns:r="http://schemas.openxmlformats.org/officeDocument/2006/relationships" id="2147483651" r:id="Rd51890c086e042b2"/>
+    <p:sldLayoutId xmlns:r="http://schemas.openxmlformats.org/officeDocument/2006/relationships" id="2147483652" r:id="R2acacf5e37284908"/>
+    <p:sldLayoutId xmlns:r="http://schemas.openxmlformats.org/officeDocument/2006/relationships" id="2147483653" r:id="Rb8dbfc61acac4697"/>
+    <p:sldLayoutId xmlns:r="http://schemas.openxmlformats.org/officeDocument/2006/relationships" id="2147483654" r:id="R028841a36d2e40dc"/>
+    <p:sldLayoutId xmlns:r="http://schemas.openxmlformats.org/officeDocument/2006/relationships" id="2147483655" r:id="R628e619c3d004378"/>
+    <p:sldLayoutId xmlns:r="http://schemas.openxmlformats.org/officeDocument/2006/relationships" id="2147483656" r:id="R51bfcb488d524fe2"/>
+    <p:sldLayoutId xmlns:r="http://schemas.openxmlformats.org/officeDocument/2006/relationships" id="2147483657" r:id="R2f3dc62efd64464c"/>
+    <p:sldLayoutId xmlns:r="http://schemas.openxmlformats.org/officeDocument/2006/relationships" id="2147483658" r:id="R12c66c73327848e6"/>
+    <p:sldLayoutId xmlns:r="http://schemas.openxmlformats.org/officeDocument/2006/relationships" id="2147483659" r:id="Rf0ccd08cd6d342e3"/>
   </p:sldLayoutIdLst>
   <p:hf hdr="0" ftr="0" dt="0"/>
   <p:txStyles>

--- a/Mapped Curriculum Lessons/Grade 8/Lesson 30 - Changing 2D List Rows/Changing 2D List Rows - Slides.pptx
+++ b/Mapped Curriculum Lessons/Grade 8/Lesson 30 - Changing 2D List Rows/Changing 2D List Rows - Slides.pptx
@@ -2,28 +2,28 @@
 <file path=ppt/presentation.xml><?xml version="1.0" encoding="utf-8"?>
 <p:presentation xmlns:p="http://schemas.openxmlformats.org/presentationml/2006/main" embedTrueTypeFonts="1" saveSubsetFonts="0">
   <p:sldMasterIdLst>
-    <p:sldMasterId xmlns:r="http://schemas.openxmlformats.org/officeDocument/2006/relationships" id="2147483648" r:id="R90eccc48b35949b0"/>
+    <p:sldMasterId xmlns:r="http://schemas.openxmlformats.org/officeDocument/2006/relationships" id="2147483648" r:id="Re7beebb586404a69"/>
   </p:sldMasterIdLst>
   <p:notesMasterIdLst>
-    <p:notesMasterId xmlns:r="http://schemas.openxmlformats.org/officeDocument/2006/relationships" r:id="Rfa8f3e3467e342e7"/>
+    <p:notesMasterId xmlns:r="http://schemas.openxmlformats.org/officeDocument/2006/relationships" r:id="R98f8f7c6094744d3"/>
   </p:notesMasterIdLst>
   <p:sldIdLst>
-    <p:sldId xmlns:r="http://schemas.openxmlformats.org/officeDocument/2006/relationships" id="256" r:id="Rf2bfaaaea6fa48de"/>
-    <p:sldId xmlns:r="http://schemas.openxmlformats.org/officeDocument/2006/relationships" id="257" r:id="R192db6ca800d49d4"/>
-    <p:sldId xmlns:r="http://schemas.openxmlformats.org/officeDocument/2006/relationships" id="258" r:id="Rff6f24d004a14b61"/>
-    <p:sldId xmlns:r="http://schemas.openxmlformats.org/officeDocument/2006/relationships" id="259" r:id="R7786925c9177478a"/>
-    <p:sldId xmlns:r="http://schemas.openxmlformats.org/officeDocument/2006/relationships" id="260" r:id="R48410271088e4d7a"/>
-    <p:sldId xmlns:r="http://schemas.openxmlformats.org/officeDocument/2006/relationships" id="261" r:id="R61d464f2f31847cf"/>
-    <p:sldId xmlns:r="http://schemas.openxmlformats.org/officeDocument/2006/relationships" id="262" r:id="R3f1077b00eb04668"/>
-    <p:sldId xmlns:r="http://schemas.openxmlformats.org/officeDocument/2006/relationships" id="263" r:id="Rc8beccc5757b4e07"/>
-    <p:sldId xmlns:r="http://schemas.openxmlformats.org/officeDocument/2006/relationships" id="264" r:id="R0df94ccaef1140db"/>
+    <p:sldId xmlns:r="http://schemas.openxmlformats.org/officeDocument/2006/relationships" id="256" r:id="R10309fa9655b423c"/>
+    <p:sldId xmlns:r="http://schemas.openxmlformats.org/officeDocument/2006/relationships" id="257" r:id="Rf57042ba83b04608"/>
+    <p:sldId xmlns:r="http://schemas.openxmlformats.org/officeDocument/2006/relationships" id="258" r:id="Rfe9a012c97a24e90"/>
+    <p:sldId xmlns:r="http://schemas.openxmlformats.org/officeDocument/2006/relationships" id="259" r:id="R3c78ebb1283a4aa9"/>
+    <p:sldId xmlns:r="http://schemas.openxmlformats.org/officeDocument/2006/relationships" id="260" r:id="R828456a381124d83"/>
+    <p:sldId xmlns:r="http://schemas.openxmlformats.org/officeDocument/2006/relationships" id="261" r:id="R6a71af33eae440b1"/>
+    <p:sldId xmlns:r="http://schemas.openxmlformats.org/officeDocument/2006/relationships" id="262" r:id="R59a5133bc8e94a30"/>
+    <p:sldId xmlns:r="http://schemas.openxmlformats.org/officeDocument/2006/relationships" id="263" r:id="R2c639450b39a47c9"/>
+    <p:sldId xmlns:r="http://schemas.openxmlformats.org/officeDocument/2006/relationships" id="264" r:id="R211dafaf12fd4021"/>
   </p:sldIdLst>
   <p:sldSz cx="12192000" cy="6858000"/>
   <p:notesSz cx="6858000" cy="9144000"/>
   <p:embeddedFontLst>
     <p:embeddedFont>
       <p:font typeface="JetBrains Mono"/>
-      <p:regular xmlns:r="http://schemas.openxmlformats.org/officeDocument/2006/relationships" r:id="Rd01db7a7274248c6"/>
+      <p:regular xmlns:r="http://schemas.openxmlformats.org/officeDocument/2006/relationships" r:id="R0a36268090c3467e"/>
     </p:embeddedFont>
   </p:embeddedFontLst>
 </p:presentation>
@@ -1071,7 +1071,7 @@
           <p:nvPr/>
         </p:nvPicPr>
         <p:blipFill rotWithShape="1">
-          <a:blip xmlns:r="http://schemas.openxmlformats.org/officeDocument/2006/relationships" xmlns:a="http://schemas.openxmlformats.org/drawingml/2006/main" r:embed="Rcac72d4dda664868"/>
+          <a:blip xmlns:r="http://schemas.openxmlformats.org/officeDocument/2006/relationships" xmlns:a="http://schemas.openxmlformats.org/drawingml/2006/main" r:embed="R7179579a5e334dd2"/>
           <a:stretch xmlns:a="http://schemas.openxmlformats.org/drawingml/2006/main"/>
         </p:blipFill>
         <p:spPr>
@@ -1451,7 +1451,7 @@
           <p:nvPr/>
         </p:nvPicPr>
         <p:blipFill rotWithShape="1">
-          <a:blip xmlns:r="http://schemas.openxmlformats.org/officeDocument/2006/relationships" xmlns:a="http://schemas.openxmlformats.org/drawingml/2006/main" r:embed="R06c94114aa0e433f">
+          <a:blip xmlns:r="http://schemas.openxmlformats.org/officeDocument/2006/relationships" xmlns:a="http://schemas.openxmlformats.org/drawingml/2006/main" r:embed="Rf36e7aa1ca194e88">
             <a:alphaModFix amt="28000"/>
           </a:blip>
           <a:stretch xmlns:a="http://schemas.openxmlformats.org/drawingml/2006/main"/>
@@ -1664,7 +1664,7 @@
           <p:nvPr/>
         </p:nvPicPr>
         <p:blipFill rotWithShape="1">
-          <a:blip xmlns:r="http://schemas.openxmlformats.org/officeDocument/2006/relationships" xmlns:a="http://schemas.openxmlformats.org/drawingml/2006/main" r:embed="R79ad4f2622784aad">
+          <a:blip xmlns:r="http://schemas.openxmlformats.org/officeDocument/2006/relationships" xmlns:a="http://schemas.openxmlformats.org/drawingml/2006/main" r:embed="Raa2e276e722c4055">
             <a:alphaModFix amt="28000"/>
           </a:blip>
           <a:stretch xmlns:a="http://schemas.openxmlformats.org/drawingml/2006/main"/>
@@ -1899,7 +1899,7 @@
           <p:nvPr/>
         </p:nvPicPr>
         <p:blipFill rotWithShape="1">
-          <a:blip xmlns:r="http://schemas.openxmlformats.org/officeDocument/2006/relationships" xmlns:a="http://schemas.openxmlformats.org/drawingml/2006/main" r:embed="R5b46ab87f35a49e2">
+          <a:blip xmlns:r="http://schemas.openxmlformats.org/officeDocument/2006/relationships" xmlns:a="http://schemas.openxmlformats.org/drawingml/2006/main" r:embed="R52948c6700f34c3a">
             <a:alphaModFix amt="28000"/>
           </a:blip>
           <a:stretch xmlns:a="http://schemas.openxmlformats.org/drawingml/2006/main"/>
@@ -2176,7 +2176,7 @@
           <p:nvPr/>
         </p:nvPicPr>
         <p:blipFill rotWithShape="1">
-          <a:blip xmlns:r="http://schemas.openxmlformats.org/officeDocument/2006/relationships" xmlns:a="http://schemas.openxmlformats.org/drawingml/2006/main" r:embed="R311b88a61ba84cb0">
+          <a:blip xmlns:r="http://schemas.openxmlformats.org/officeDocument/2006/relationships" xmlns:a="http://schemas.openxmlformats.org/drawingml/2006/main" r:embed="R3e7b49ba614841ae">
             <a:alphaModFix amt="28000"/>
           </a:blip>
           <a:stretch xmlns:a="http://schemas.openxmlformats.org/drawingml/2006/main"/>
@@ -2451,7 +2451,7 @@
           <p:nvPr/>
         </p:nvPicPr>
         <p:blipFill rotWithShape="1">
-          <a:blip xmlns:r="http://schemas.openxmlformats.org/officeDocument/2006/relationships" xmlns:a="http://schemas.openxmlformats.org/drawingml/2006/main" r:embed="R05d30e0f57d247ad">
+          <a:blip xmlns:r="http://schemas.openxmlformats.org/officeDocument/2006/relationships" xmlns:a="http://schemas.openxmlformats.org/drawingml/2006/main" r:embed="R6553ced69f094ad0">
             <a:alphaModFix amt="28000"/>
           </a:blip>
           <a:stretch xmlns:a="http://schemas.openxmlformats.org/drawingml/2006/main"/>
@@ -2875,7 +2875,7 @@
           <p:nvPr/>
         </p:nvPicPr>
         <p:blipFill rotWithShape="1">
-          <a:blip xmlns:r="http://schemas.openxmlformats.org/officeDocument/2006/relationships" xmlns:a="http://schemas.openxmlformats.org/drawingml/2006/main" r:embed="R3ffc7d5f747d42c8">
+          <a:blip xmlns:r="http://schemas.openxmlformats.org/officeDocument/2006/relationships" xmlns:a="http://schemas.openxmlformats.org/drawingml/2006/main" r:embed="Ra6173a4f2b3b49ed">
             <a:alphaModFix amt="28000"/>
           </a:blip>
           <a:stretch xmlns:a="http://schemas.openxmlformats.org/drawingml/2006/main"/>
@@ -3016,7 +3016,7 @@
           <p:nvPr/>
         </p:nvPicPr>
         <p:blipFill rotWithShape="1">
-          <a:blip xmlns:r="http://schemas.openxmlformats.org/officeDocument/2006/relationships" xmlns:a="http://schemas.openxmlformats.org/drawingml/2006/main" r:embed="R7656d44a80ef44e3">
+          <a:blip xmlns:r="http://schemas.openxmlformats.org/officeDocument/2006/relationships" xmlns:a="http://schemas.openxmlformats.org/drawingml/2006/main" r:embed="R4b10f2d208944fb9">
             <a:alphaModFix amt="28000"/>
           </a:blip>
           <a:stretch xmlns:a="http://schemas.openxmlformats.org/drawingml/2006/main"/>
@@ -3130,7 +3130,7 @@
           <p:nvPr/>
         </p:nvPicPr>
         <p:blipFill rotWithShape="1">
-          <a:blip xmlns:r="http://schemas.openxmlformats.org/officeDocument/2006/relationships" xmlns:a="http://schemas.openxmlformats.org/drawingml/2006/main" r:embed="R68b53c303935443f">
+          <a:blip xmlns:r="http://schemas.openxmlformats.org/officeDocument/2006/relationships" xmlns:a="http://schemas.openxmlformats.org/drawingml/2006/main" r:embed="Rb1278066b4ae420d">
             <a:alphaModFix amt="28000"/>
           </a:blip>
           <a:stretch xmlns:a="http://schemas.openxmlformats.org/drawingml/2006/main"/>
@@ -3457,7 +3457,7 @@
           <p:nvPr/>
         </p:nvPicPr>
         <p:blipFill rotWithShape="1">
-          <a:blip xmlns:r="http://schemas.openxmlformats.org/officeDocument/2006/relationships" xmlns:a="http://schemas.openxmlformats.org/drawingml/2006/main" r:embed="Rcb9e6b5348914c15">
+          <a:blip xmlns:r="http://schemas.openxmlformats.org/officeDocument/2006/relationships" xmlns:a="http://schemas.openxmlformats.org/drawingml/2006/main" r:embed="Ra3e6f915009f4f7e">
             <a:alphaModFix amt="28000"/>
           </a:blip>
           <a:stretch xmlns:a="http://schemas.openxmlformats.org/drawingml/2006/main"/>
@@ -3745,7 +3745,7 @@
           <p:nvPr/>
         </p:nvPicPr>
         <p:blipFill rotWithShape="1">
-          <a:blip xmlns:r="http://schemas.openxmlformats.org/officeDocument/2006/relationships" xmlns:a="http://schemas.openxmlformats.org/drawingml/2006/main" r:embed="R79982c941753475c">
+          <a:blip xmlns:r="http://schemas.openxmlformats.org/officeDocument/2006/relationships" xmlns:a="http://schemas.openxmlformats.org/drawingml/2006/main" r:embed="R3af78b70be894ad9">
             <a:alphaModFix amt="28000"/>
           </a:blip>
           <a:stretch xmlns:a="http://schemas.openxmlformats.org/drawingml/2006/main"/>
@@ -3982,17 +3982,17 @@
   </p:cSld>
   <p:clrMap bg1="lt1" tx1="dk1" bg2="lt2" tx2="dk2" accent1="accent1" accent2="accent2" accent3="accent3" accent4="accent4" accent5="accent5" accent6="accent6" hlink="hlink" folHlink="folHlink"/>
   <p:sldLayoutIdLst>
-    <p:sldLayoutId xmlns:r="http://schemas.openxmlformats.org/officeDocument/2006/relationships" id="2147483649" r:id="Rd688c353d5664a4f"/>
-    <p:sldLayoutId xmlns:r="http://schemas.openxmlformats.org/officeDocument/2006/relationships" id="2147483650" r:id="R0cc0fca7c4564b01"/>
-    <p:sldLayoutId xmlns:r="http://schemas.openxmlformats.org/officeDocument/2006/relationships" id="2147483651" r:id="Rd51890c086e042b2"/>
-    <p:sldLayoutId xmlns:r="http://schemas.openxmlformats.org/officeDocument/2006/relationships" id="2147483652" r:id="R2acacf5e37284908"/>
-    <p:sldLayoutId xmlns:r="http://schemas.openxmlformats.org/officeDocument/2006/relationships" id="2147483653" r:id="Rb8dbfc61acac4697"/>
-    <p:sldLayoutId xmlns:r="http://schemas.openxmlformats.org/officeDocument/2006/relationships" id="2147483654" r:id="R028841a36d2e40dc"/>
-    <p:sldLayoutId xmlns:r="http://schemas.openxmlformats.org/officeDocument/2006/relationships" id="2147483655" r:id="R628e619c3d004378"/>
-    <p:sldLayoutId xmlns:r="http://schemas.openxmlformats.org/officeDocument/2006/relationships" id="2147483656" r:id="R51bfcb488d524fe2"/>
-    <p:sldLayoutId xmlns:r="http://schemas.openxmlformats.org/officeDocument/2006/relationships" id="2147483657" r:id="R2f3dc62efd64464c"/>
-    <p:sldLayoutId xmlns:r="http://schemas.openxmlformats.org/officeDocument/2006/relationships" id="2147483658" r:id="R12c66c73327848e6"/>
-    <p:sldLayoutId xmlns:r="http://schemas.openxmlformats.org/officeDocument/2006/relationships" id="2147483659" r:id="Rf0ccd08cd6d342e3"/>
+    <p:sldLayoutId xmlns:r="http://schemas.openxmlformats.org/officeDocument/2006/relationships" id="2147483649" r:id="R9790e06eb828441d"/>
+    <p:sldLayoutId xmlns:r="http://schemas.openxmlformats.org/officeDocument/2006/relationships" id="2147483650" r:id="Rd7d3e594b0d24099"/>
+    <p:sldLayoutId xmlns:r="http://schemas.openxmlformats.org/officeDocument/2006/relationships" id="2147483651" r:id="Radf914222cb2422d"/>
+    <p:sldLayoutId xmlns:r="http://schemas.openxmlformats.org/officeDocument/2006/relationships" id="2147483652" r:id="Rdb33e949344045e3"/>
+    <p:sldLayoutId xmlns:r="http://schemas.openxmlformats.org/officeDocument/2006/relationships" id="2147483653" r:id="R4d08ff18e04d4308"/>
+    <p:sldLayoutId xmlns:r="http://schemas.openxmlformats.org/officeDocument/2006/relationships" id="2147483654" r:id="R570e8fb8f1f44daf"/>
+    <p:sldLayoutId xmlns:r="http://schemas.openxmlformats.org/officeDocument/2006/relationships" id="2147483655" r:id="Rdb6b9c7c65d64d2b"/>
+    <p:sldLayoutId xmlns:r="http://schemas.openxmlformats.org/officeDocument/2006/relationships" id="2147483656" r:id="R48c0c34484d2472c"/>
+    <p:sldLayoutId xmlns:r="http://schemas.openxmlformats.org/officeDocument/2006/relationships" id="2147483657" r:id="Ra86cf08214c84f75"/>
+    <p:sldLayoutId xmlns:r="http://schemas.openxmlformats.org/officeDocument/2006/relationships" id="2147483658" r:id="Re938ce59bbe34e67"/>
+    <p:sldLayoutId xmlns:r="http://schemas.openxmlformats.org/officeDocument/2006/relationships" id="2147483659" r:id="R3c33c9ffad704b05"/>
   </p:sldLayoutIdLst>
   <p:hf hdr="0" ftr="0" dt="0"/>
   <p:txStyles>
@@ -5155,24 +5155,13 @@
             <a:r>
               <a:rPr sz="2400">
                 <a:solidFill>
-                  <a:srgbClr val="080808"/>
-                </a:solidFill>
-                <a:latin typeface="JetBrains Mono"/>
-                <a:ea typeface="JetBrains Mono"/>
-                <a:cs typeface="JetBrains Mono"/>
-              </a:rPr>
-              <a:t>    </a:t>
-            </a:r>
-            <a:r>
-              <a:rPr sz="2400">
-                <a:solidFill>
                   <a:srgbClr val="1750EB"/>
                 </a:solidFill>
                 <a:latin typeface="JetBrains Mono"/>
                 <a:ea typeface="JetBrains Mono"/>
                 <a:cs typeface="JetBrains Mono"/>
               </a:rPr>
-              <a:t>print</a:t>
+              <a:t>    print</a:t>
             </a:r>
             <a:r>
               <a:rPr sz="2400">
@@ -5730,24 +5719,13 @@
             <a:r>
               <a:rPr sz="2400">
                 <a:solidFill>
-                  <a:srgbClr val="080808"/>
-                </a:solidFill>
-                <a:latin typeface="JetBrains Mono"/>
-                <a:ea typeface="JetBrains Mono"/>
-                <a:cs typeface="JetBrains Mono"/>
-              </a:rPr>
-              <a:t>    </a:t>
-            </a:r>
-            <a:r>
-              <a:rPr sz="2400">
-                <a:solidFill>
                   <a:srgbClr val="1750EB"/>
                 </a:solidFill>
                 <a:latin typeface="JetBrains Mono"/>
                 <a:ea typeface="JetBrains Mono"/>
                 <a:cs typeface="JetBrains Mono"/>
               </a:rPr>
-              <a:t>print</a:t>
+              <a:t>    print</a:t>
             </a:r>
             <a:r>
               <a:rPr sz="2400">
@@ -6305,24 +6283,13 @@
             <a:r>
               <a:rPr sz="2400">
                 <a:solidFill>
-                  <a:srgbClr val="080808"/>
-                </a:solidFill>
-                <a:latin typeface="JetBrains Mono"/>
-                <a:ea typeface="JetBrains Mono"/>
-                <a:cs typeface="JetBrains Mono"/>
-              </a:rPr>
-              <a:t>    </a:t>
-            </a:r>
-            <a:r>
-              <a:rPr sz="2400">
-                <a:solidFill>
                   <a:srgbClr val="1750EB"/>
                 </a:solidFill>
                 <a:latin typeface="JetBrains Mono"/>
                 <a:ea typeface="JetBrains Mono"/>
                 <a:cs typeface="JetBrains Mono"/>
               </a:rPr>
-              <a:t>print</a:t>
+              <a:t>    print</a:t>
             </a:r>
             <a:r>
               <a:rPr sz="2400">
@@ -7143,24 +7110,13 @@
             <a:r>
               <a:rPr sz="1400">
                 <a:solidFill>
-                  <a:srgbClr val="080808"/>
-                </a:solidFill>
-                <a:latin typeface="JetBrains Mono"/>
-                <a:ea typeface="JetBrains Mono"/>
-                <a:cs typeface="JetBrains Mono"/>
-              </a:rPr>
-              <a:t>    </a:t>
-            </a:r>
-            <a:r>
-              <a:rPr sz="1400">
-                <a:solidFill>
                   <a:srgbClr val="1750EB"/>
                 </a:solidFill>
                 <a:latin typeface="JetBrains Mono"/>
                 <a:ea typeface="JetBrains Mono"/>
                 <a:cs typeface="JetBrains Mono"/>
               </a:rPr>
-              <a:t>print</a:t>
+              <a:t>    print</a:t>
             </a:r>
             <a:r>
               <a:rPr sz="1400">
@@ -7936,24 +7892,13 @@
             <a:r>
               <a:rPr sz="1400">
                 <a:solidFill>
-                  <a:srgbClr val="080808"/>
-                </a:solidFill>
-                <a:latin typeface="JetBrains Mono"/>
-                <a:ea typeface="JetBrains Mono"/>
-                <a:cs typeface="JetBrains Mono"/>
-              </a:rPr>
-              <a:t>    </a:t>
-            </a:r>
-            <a:r>
-              <a:rPr sz="1400">
-                <a:solidFill>
                   <a:srgbClr val="1750EB"/>
                 </a:solidFill>
                 <a:latin typeface="JetBrains Mono"/>
                 <a:ea typeface="JetBrains Mono"/>
                 <a:cs typeface="JetBrains Mono"/>
               </a:rPr>
-              <a:t>print</a:t>
+              <a:t>    print</a:t>
             </a:r>
             <a:r>
               <a:rPr sz="1400">
@@ -8776,24 +8721,13 @@
             <a:r>
               <a:rPr sz="1400">
                 <a:solidFill>
-                  <a:srgbClr val="080808"/>
-                </a:solidFill>
-                <a:latin typeface="JetBrains Mono"/>
-                <a:ea typeface="JetBrains Mono"/>
-                <a:cs typeface="JetBrains Mono"/>
-              </a:rPr>
-              <a:t>    </a:t>
-            </a:r>
-            <a:r>
-              <a:rPr sz="1400">
-                <a:solidFill>
                   <a:srgbClr val="1750EB"/>
                 </a:solidFill>
                 <a:latin typeface="JetBrains Mono"/>
                 <a:ea typeface="JetBrains Mono"/>
                 <a:cs typeface="JetBrains Mono"/>
               </a:rPr>
-              <a:t>print</a:t>
+              <a:t>    print</a:t>
             </a:r>
             <a:r>
               <a:rPr sz="1400">
@@ -9588,24 +9522,13 @@
             <a:r>
               <a:rPr sz="1400">
                 <a:solidFill>
-                  <a:srgbClr val="080808"/>
-                </a:solidFill>
-                <a:latin typeface="JetBrains Mono"/>
-                <a:ea typeface="JetBrains Mono"/>
-                <a:cs typeface="JetBrains Mono"/>
-              </a:rPr>
-              <a:t>    </a:t>
-            </a:r>
-            <a:r>
-              <a:rPr sz="1400">
-                <a:solidFill>
                   <a:srgbClr val="1750EB"/>
                 </a:solidFill>
                 <a:latin typeface="JetBrains Mono"/>
                 <a:ea typeface="JetBrains Mono"/>
                 <a:cs typeface="JetBrains Mono"/>
               </a:rPr>
-              <a:t>print</a:t>
+              <a:t>    print</a:t>
             </a:r>
             <a:r>
               <a:rPr sz="1400">
